--- a/mkt1107/output/MKT1107_W07_slides.pptx
+++ b/mkt1107/output/MKT1107_W07_slides.pptx
@@ -68,10 +68,9 @@
     <p:sldId id="316" r:id="rId62"/>
     <p:sldId id="317" r:id="rId63"/>
     <p:sldId id="318" r:id="rId64"/>
-    <p:sldId id="319" r:id="rId65"/>
   </p:sldIdLst>
   <p:notesMasterIdLst>
-    <p:notesMasterId r:id="rId66"/>
+    <p:notesMasterId r:id="rId65"/>
   </p:notesMasterIdLst>
   <p:sldSz cx="12192000" cy="6858000"/>
   <p:notesSz cx="6858000" cy="12192000"/>
@@ -170,19 +169,19 @@
   <p:extLst>
     <p:ext uri="{521415D9-36F7-43E2-AB2F-B90AF26B5E84}">
       <p14:sectionLst xmlns:p14="http://schemas.microsoft.com/office/powerpoint/2010/main">
-        <p14:section name="Mở đầu" id="{1cd6c4f8-b46d-48fc-8f78-b47b6e9a0bd4}">
+        <p14:section name="Mở đầu" id="{1e899977-b9fa-2631-2c9c-6d253dc23e5b}">
           <p14:sldIdLst>
             <p14:sldId id="256"/>
           </p14:sldIdLst>
         </p14:section>
-        <p14:section name="S1 · Khởi động — chữa nhanh đề cương M4" id="{9c77b5a5-740b-f2f6-4d0f-669b24ebe97d}">
+        <p14:section name="S1 · Khởi động — chữa nhanh đề cương M4" id="{60d87e30-3ec3-52e1-91de-334f5b966d81}">
           <p14:sldIdLst>
             <p14:sldId id="257"/>
             <p14:sldId id="258"/>
             <p14:sldId id="259"/>
           </p14:sldIdLst>
         </p14:section>
-        <p14:section name="S2 · 5.1 Dữ liệu thứ cấp" id="{6aeffb3f-7be6-0b1a-1f89-0f4985547adc}">
+        <p14:section name="S2 · 5.1 Dữ liệu thứ cấp" id="{083e9db3-f6a6-5f82-a9d2-3a68c66daf07}">
           <p14:sldIdLst>
             <p14:sldId id="260"/>
             <p14:sldId id="261"/>
@@ -200,7 +199,7 @@
             <p14:sldId id="273"/>
           </p14:sldIdLst>
         </p14:section>
-        <p14:section name="S3 · Kiểm tra nhanh: soi một con số" id="{2b9fc1b5-cf1e-96fb-9cf1-532a6a790fe1}">
+        <p14:section name="S3 · Kiểm tra nhanh: soi một con số" id="{bc80fe7a-2bae-671b-a923-fb8ed976b854}">
           <p14:sldIdLst>
             <p14:sldId id="274"/>
             <p14:sldId id="275"/>
@@ -209,7 +208,7 @@
             <p14:sldId id="278"/>
           </p14:sldIdLst>
         </p14:section>
-        <p14:section name="S4 · Dữ liệu sơ cấp — quan sát và dân tộc học" id="{fab4940c-c65c-bc73-4e14-8c3968c11a2a}">
+        <p14:section name="S4 · Dữ liệu sơ cấp — quan sát và dân tộc học" id="{e4b27375-a4a2-399c-effc-7fe18715e2a5}">
           <p14:sldIdLst>
             <p14:sldId id="279"/>
             <p14:sldId id="280"/>
@@ -224,7 +223,7 @@
             <p14:sldId id="289"/>
           </p14:sldIdLst>
         </p14:section>
-        <p14:section name="S5 · Thảo luận nhóm và phỏng vấn sâu" id="{addbe4e3-4b88-a676-601a-9abff76ea211}">
+        <p14:section name="S5 · Thảo luận nhóm và phỏng vấn sâu" id="{6eacd6e3-08dd-14b4-bcc6-28a8b6f0916f}">
           <p14:sldIdLst>
             <p14:sldId id="290"/>
             <p14:sldId id="291"/>
@@ -238,7 +237,7 @@
             <p14:sldId id="299"/>
           </p14:sldIdLst>
         </p14:section>
-        <p14:section name="S6 · Nghiên cứu định lượng" id="{19ae8bbb-cb5f-96ce-f86c-b2000585525f}">
+        <p14:section name="S6 · Nghiên cứu định lượng" id="{463f99be-6ecc-fd96-e81c-d94fd90ff689}">
           <p14:sldIdLst>
             <p14:sldId id="300"/>
             <p14:sldId id="301"/>
@@ -249,7 +248,7 @@
             <p14:sldId id="306"/>
           </p14:sldIdLst>
         </p14:section>
-        <p14:section name="S7 · Hỗn hợp, chọn phương pháp, đạo đức" id="{ad0a278b-9382-c69e-112b-a652de79e808}">
+        <p14:section name="S7 · Hỗn hợp, chọn phương pháp, đạo đức" id="{03c4a961-8ba8-c1eb-098d-702b2fc0d3f0}">
           <p14:sldIdLst>
             <p14:sldId id="307"/>
             <p14:sldId id="308"/>
@@ -258,20 +257,19 @@
             <p14:sldId id="311"/>
           </p14:sldIdLst>
         </p14:section>
-        <p14:section name="S8 · Thực hành nhóm: Xưởng phương pháp" id="{8b5912ad-389e-c4ff-6212-9427baff1346}">
+        <p14:section name="S8 · Thực hành nhóm: Xưởng phương pháp" id="{9980011f-8d04-e65d-d25b-1e792536cd8f}">
           <p14:sldIdLst>
             <p14:sldId id="312"/>
             <p14:sldId id="313"/>
           </p14:sldIdLst>
         </p14:section>
-        <p14:section name="S9 · Kết buổi" id="{3c3e0e04-a8e7-4fdc-d1ba-db361bdebac1}">
+        <p14:section name="S9 · Kết buổi" id="{f65d64ce-fffc-3967-7ba0-dee0ed712cdf}">
           <p14:sldIdLst>
             <p14:sldId id="314"/>
             <p14:sldId id="315"/>
             <p14:sldId id="316"/>
             <p14:sldId id="317"/>
             <p14:sldId id="318"/>
-            <p14:sldId id="319"/>
           </p14:sldIdLst>
         </p14:section>
       </p14:sectionLst>
@@ -3227,7 +3225,8 @@
             <a:r>
               <a:rPr lang="en-US" dirty="0"/>
               <a:t>Phần S5 khoảng 17 phút: thảo luận nhóm tập trung (định nghĩa, vai trò người điều phối, hiệu ứng tuân thủ đám đông), phỏng vấn sâu (điểm mạnh, điểm yếu, ba kỹ năng), một hoạt động nhỏ 3 phút sửa ba câu hỏi lỗi, và khi nào chọn phương pháp nào.
-Slide UEF dừng ở phần quan sát — toàn bộ phần này dùng slide bổ sung. Mở phần bằng câu hỏi đã gợi trong giờ giải lao.</a:t>
+Slide UEF dừng ở phần quan sát — toàn bộ phần này dùng slide bổ sung. Mở phần bằng câu hỏi đã gợi trong giờ giải lao.
+Nhắc lớp: phần này nối trực tiếp với thực hành cuối buổi — mỗi bạn sẽ đóng vai phỏng vấn sâu 5 phút, nên chú ý ba kỹ năng và ba loại câu hỏi cần tránh.</a:t>
             </a:r>
             <a:endParaRPr lang="en-US" dirty="0"/>
           </a:p>
@@ -4228,7 +4227,8 @@
             <a:r>
               <a:rPr lang="en-US" dirty="0"/>
               <a:t>Phần S6 khoảng 12 phút: khảo sát với bốn hình thức và cách khắc phục nhược điểm của khảo sát online; nhóm cố định; thử nghiệm với nhóm thử nghiệm, nhóm đối chứng, phân nhóm ngẫu nhiên và tình huống "biến thứ ba".
-Nói: "Định tính trả lời 'vì sao'. Giờ sang các phương pháp trả lời 'bao nhiêu' và 'có gây ra không'." Nếu trễ giờ, phần nhóm cố định chỉ nêu định nghĩa một câu.</a:t>
+Nói: "Định tính trả lời 'vì sao'. Giờ sang các phương pháp trả lời 'bao nhiêu' và 'có gây ra không'." Nếu trễ giờ, phần nhóm cố định chỉ nêu định nghĩa một câu.
+Nhắc lớp: phần lớn các nhóm định lượng sẽ làm khảo sát trực tuyến, nên slide về bốn việc cần ghi rõ trong phần phương pháp là phần các nhóm dùng ngay.</a:t>
             </a:r>
             <a:endParaRPr lang="en-US" dirty="0"/>
           </a:p>
@@ -4955,7 +4955,8 @@
             <a:r>
               <a:rPr lang="en-US" dirty="0"/>
               <a:t>Phần S7 khoảng 8 phút: phương pháp hỗn hợp (2 phút), chọn phương pháp theo câu hỏi kèm kiểm tra nhanh giơ tay (3 phút), và năm nguyên tắc đạo đức khi thu dữ liệu sơ cấp (3 phút).
-Đây là phần nối kiến thức với dự án: sau phần này các nhóm phải tự chọn và biện luận phương pháp trong thực hành. Phần đạo đức không cắt khi trễ giờ.</a:t>
+Đây là phần nối kiến thức với dự án: sau phần này các nhóm phải tự chọn và biện luận phương pháp trong thực hành. Phần đạo đức không cắt khi trễ giờ.
+Chuẩn bị sẵn quy ước giơ tay 1–5 ngón cho phần kiểm tra nhanh; quy ước này trùng với thứ tự các dòng trong bảng chọn phương pháp.</a:t>
             </a:r>
             <a:endParaRPr lang="en-US" dirty="0"/>
           </a:p>
@@ -5589,7 +5590,8 @@
             <a:r>
               <a:rPr lang="en-US" dirty="0"/>
               <a:t>Năm phút cuối: phiếu ra về, giao bài tập về nhà theo lộ trình dự án và nối sang Buổi 8. Phát phiếu giấy nhỏ cho từng bạn ngay khi chặng chia sẻ kết thúc để tiết kiệm thời gian.
-Không cắt phần này khi trễ giờ: phiếu ra về là cách giảng viên kiểm tra mục tiêu cốt lõi của buổi — nhóm có chọn phương pháp xuất phát từ câu hỏi nghiên cứu hay không.</a:t>
+Không cắt phần này khi trễ giờ: phiếu ra về là cách giảng viên kiểm tra mục tiêu cốt lõi của buổi — nhóm có chọn phương pháp xuất phát từ câu hỏi nghiên cứu hay không.
+Nếu còn thời gian, nhắc lại một câu: dữ liệu thứ cấp trước, sơ cấp sau, và câu hỏi quyết định phương pháp.</a:t>
             </a:r>
             <a:endParaRPr lang="en-US" dirty="0"/>
           </a:p>
@@ -6064,94 +6066,6 @@
             <a:fld id="{F7021451-1387-4CA6-816F-3879F97B5CBC}" type="slidenum">
               <a:rPr lang="en-US"/>
               <a:t>63</a:t>
-            </a:fld>
-            <a:endParaRPr lang="en-US"/>
-          </a:p>
-        </p:txBody>
-      </p:sp>
-    </p:spTree>
-    <p:extLst>
-      <p:ext uri="{BB962C8B-B14F-4D97-AF65-F5344CB8AC3E}">
-        <p14:creationId xmlns:p14="http://schemas.microsoft.com/office/powerpoint/2010/main" val="1024086991"/>
-      </p:ext>
-    </p:extLst>
-  </p:cSld>
-  <p:clrMapOvr>
-    <a:masterClrMapping/>
-  </p:clrMapOvr>
-</p:notes>
-</file>
-
-<file path=ppt/notesSlides/notesSlide64.xml><?xml version="1.0" encoding="utf-8"?>
-<p:notes xmlns:a="http://schemas.openxmlformats.org/drawingml/2006/main" xmlns:r="http://schemas.openxmlformats.org/officeDocument/2006/relationships" xmlns:p="http://schemas.openxmlformats.org/presentationml/2006/main">
-  <p:cSld>
-    <p:spTree>
-      <p:nvGrpSpPr>
-        <p:cNvPr id="1" name=""/>
-        <p:cNvGrpSpPr/>
-        <p:nvPr/>
-      </p:nvGrpSpPr>
-      <p:grpSpPr>
-        <a:xfrm>
-          <a:off x="0" y="0"/>
-          <a:ext cx="0" cy="0"/>
-          <a:chOff x="0" y="0"/>
-          <a:chExt cx="0" cy="0"/>
-        </a:xfrm>
-      </p:grpSpPr>
-      <p:sp>
-        <p:nvSpPr>
-          <p:cNvPr id="2" name="Slide Image Placeholder 1"/>
-          <p:cNvSpPr>
-            <a:spLocks noGrp="1" noRot="1" noChangeAspect="1"/>
-          </p:cNvSpPr>
-          <p:nvPr>
-            <p:ph type="sldImg"/>
-          </p:nvPr>
-        </p:nvSpPr>
-        <p:spPr/>
-      </p:sp>
-      <p:sp>
-        <p:nvSpPr>
-          <p:cNvPr id="3" name="Notes Placeholder 2"/>
-          <p:cNvSpPr>
-            <a:spLocks noGrp="1"/>
-          </p:cNvSpPr>
-          <p:nvPr>
-            <p:ph type="body" idx="1"/>
-          </p:nvPr>
-        </p:nvSpPr>
-        <p:spPr/>
-        <p:txBody>
-          <a:bodyPr/>
-          <a:lstStyle/>
-          <a:p>
-            <a:r>
-              <a:rPr lang="en-US" dirty="0"/>
-              <a:t>Tiếp danh mục tài liệu tham khảo.</a:t>
-            </a:r>
-            <a:endParaRPr lang="en-US" dirty="0"/>
-          </a:p>
-        </p:txBody>
-      </p:sp>
-      <p:sp>
-        <p:nvSpPr>
-          <p:cNvPr id="4" name="Slide Number Placeholder 3"/>
-          <p:cNvSpPr>
-            <a:spLocks noGrp="1"/>
-          </p:cNvSpPr>
-          <p:nvPr>
-            <p:ph type="sldNum" sz="quarter" idx="10"/>
-          </p:nvPr>
-        </p:nvSpPr>
-        <p:spPr/>
-        <p:txBody>
-          <a:bodyPr/>
-          <a:lstStyle/>
-          <a:p>
-            <a:fld id="{F7021451-1387-4CA6-816F-3879F97B5CBC}" type="slidenum">
-              <a:rPr lang="en-US"/>
-              <a:t>64</a:t>
             </a:fld>
             <a:endParaRPr lang="en-US"/>
           </a:p>
@@ -18327,9 +18241,9 @@
             <a:tbl>
               <a:tblPr/>
               <a:tblGrid>
-                <a:gridCol w="3688080"/>
-                <a:gridCol w="3688080"/>
-                <a:gridCol w="3688080"/>
+                <a:gridCol w="2887795"/>
+                <a:gridCol w="3931236"/>
+                <a:gridCol w="4245209"/>
               </a:tblGrid>
               <a:tr h="524256">
                 <a:tc>
@@ -25563,7 +25477,7 @@
         <p:spPr>
           <a:xfrm>
             <a:off x="5943600" y="3566160"/>
-            <a:ext cx="5303520" cy="1463040"/>
+            <a:ext cx="4297680" cy="2011680"/>
           </a:xfrm>
           <a:prstGeom prst="rect">
             <a:avLst/>
@@ -32452,7 +32366,7 @@
                 <a:ea typeface="Alexandria" pitchFamily="34" charset="-122"/>
                 <a:cs typeface="Alexandria" pitchFamily="34" charset="-120"/>
               </a:rPr>
-              <a:t> “Lần gần nhất bạn mua loại này là khi nào?”</a:t>
+              <a:t> “Lần gần nhất bạn mua loại này là khi nào?”</a:t>
             </a:r>
             <a:endParaRPr lang="en-US" sz="2900" dirty="0"/>
           </a:p>
@@ -32778,9 +32692,9 @@
             <a:tbl>
               <a:tblPr/>
               <a:tblGrid>
-                <a:gridCol w="3688080"/>
-                <a:gridCol w="3688080"/>
-                <a:gridCol w="3688080"/>
+                <a:gridCol w="3286419"/>
+                <a:gridCol w="3794609"/>
+                <a:gridCol w="3983212"/>
               </a:tblGrid>
               <a:tr h="524256">
                 <a:tc>
@@ -33643,7 +33557,7 @@
         </p:nvSpPr>
         <p:spPr>
           <a:xfrm>
-            <a:off x="548640" y="4245864"/>
+            <a:off x="548640" y="4383024"/>
             <a:ext cx="11064240" cy="1102360"/>
           </a:xfrm>
           <a:prstGeom prst="roundRect">
@@ -33665,7 +33579,7 @@
         </p:nvSpPr>
         <p:spPr>
           <a:xfrm>
-            <a:off x="731520" y="4568444"/>
+            <a:off x="731520" y="4705604"/>
             <a:ext cx="457200" cy="457200"/>
           </a:xfrm>
           <a:prstGeom prst="ellipse">
@@ -33685,7 +33599,7 @@
         </p:nvSpPr>
         <p:spPr>
           <a:xfrm>
-            <a:off x="731520" y="4568444"/>
+            <a:off x="731520" y="4705604"/>
             <a:ext cx="457200" cy="457200"/>
           </a:xfrm>
           <a:prstGeom prst="rect">
@@ -33724,7 +33638,7 @@
         </p:nvSpPr>
         <p:spPr>
           <a:xfrm>
-            <a:off x="1325880" y="4245864"/>
+            <a:off x="1325880" y="4383024"/>
             <a:ext cx="10149840" cy="1102360"/>
           </a:xfrm>
           <a:prstGeom prst="rect">
@@ -34250,9 +34164,9 @@
             <a:tbl>
               <a:tblPr/>
               <a:tblGrid>
-                <a:gridCol w="3688080"/>
-                <a:gridCol w="3688080"/>
-                <a:gridCol w="3688080"/>
+                <a:gridCol w="2866364"/>
+                <a:gridCol w="3923336"/>
+                <a:gridCol w="4274540"/>
               </a:tblGrid>
               <a:tr h="524256">
                 <a:tc>
@@ -35341,7 +35255,7 @@
         </p:nvSpPr>
         <p:spPr>
           <a:xfrm>
-            <a:off x="548640" y="4770120"/>
+            <a:off x="548640" y="4907280"/>
             <a:ext cx="11064240" cy="685800"/>
           </a:xfrm>
           <a:prstGeom prst="roundRect">
@@ -35363,7 +35277,7 @@
         </p:nvSpPr>
         <p:spPr>
           <a:xfrm>
-            <a:off x="731520" y="4884420"/>
+            <a:off x="731520" y="5021580"/>
             <a:ext cx="457200" cy="457200"/>
           </a:xfrm>
           <a:prstGeom prst="ellipse">
@@ -35383,7 +35297,7 @@
         </p:nvSpPr>
         <p:spPr>
           <a:xfrm>
-            <a:off x="731520" y="4884420"/>
+            <a:off x="731520" y="5021580"/>
             <a:ext cx="457200" cy="457200"/>
           </a:xfrm>
           <a:prstGeom prst="rect">
@@ -35422,7 +35336,7 @@
         </p:nvSpPr>
         <p:spPr>
           <a:xfrm>
-            <a:off x="1325880" y="4770120"/>
+            <a:off x="1325880" y="4907280"/>
             <a:ext cx="10149840" cy="685800"/>
           </a:xfrm>
           <a:prstGeom prst="rect">
@@ -40555,8 +40469,8 @@
             <a:tbl>
               <a:tblPr/>
               <a:tblGrid>
-                <a:gridCol w="5532120"/>
-                <a:gridCol w="5532120"/>
+                <a:gridCol w="5733527"/>
+                <a:gridCol w="5330713"/>
               </a:tblGrid>
               <a:tr h="524256">
                 <a:tc>
@@ -41468,7 +41382,7 @@
         </p:nvSpPr>
         <p:spPr>
           <a:xfrm>
-            <a:off x="548640" y="5294376"/>
+            <a:off x="548640" y="5394960"/>
             <a:ext cx="11064240" cy="685800"/>
           </a:xfrm>
           <a:prstGeom prst="roundRect">
@@ -41490,7 +41404,7 @@
         </p:nvSpPr>
         <p:spPr>
           <a:xfrm>
-            <a:off x="731520" y="5408676"/>
+            <a:off x="731520" y="5509260"/>
             <a:ext cx="457200" cy="457200"/>
           </a:xfrm>
           <a:prstGeom prst="ellipse">
@@ -41510,7 +41424,7 @@
         </p:nvSpPr>
         <p:spPr>
           <a:xfrm>
-            <a:off x="731520" y="5408676"/>
+            <a:off x="731520" y="5509260"/>
             <a:ext cx="457200" cy="457200"/>
           </a:xfrm>
           <a:prstGeom prst="rect">
@@ -41549,7 +41463,7 @@
         </p:nvSpPr>
         <p:spPr>
           <a:xfrm>
-            <a:off x="1325880" y="5294376"/>
+            <a:off x="1325880" y="5394960"/>
             <a:ext cx="10149840" cy="685800"/>
           </a:xfrm>
           <a:prstGeom prst="rect">
@@ -42229,7 +42143,7 @@
         <p:spPr>
           <a:xfrm>
             <a:off x="1234440" y="4980432"/>
-            <a:ext cx="10332720" cy="1043940"/>
+            <a:ext cx="10332720" cy="598170"/>
           </a:xfrm>
           <a:prstGeom prst="rect">
             <a:avLst/>
@@ -42256,7 +42170,7 @@
                 <a:ea typeface="Alexandria" pitchFamily="34" charset="-122"/>
                 <a:cs typeface="Alexandria" pitchFamily="34" charset="-120"/>
               </a:rPr>
-              <a:t>Thói quen mua online của một nhóm đổi ra sao qua 12 tháng?</a:t>
+              <a:t>Mua sắm online của một nhóm đổi ra sao qua 12 tháng?</a:t>
             </a:r>
             <a:endParaRPr lang="en-US" sz="2700" dirty="0"/>
           </a:p>
@@ -46840,7 +46754,7 @@
         </p:nvSpPr>
         <p:spPr>
           <a:xfrm>
-            <a:off x="585216" y="3425952"/>
+            <a:off x="585216" y="3389376"/>
             <a:ext cx="164592" cy="164592"/>
           </a:xfrm>
           <a:prstGeom prst="ellipse">
@@ -46860,7 +46774,7 @@
         </p:nvSpPr>
         <p:spPr>
           <a:xfrm>
-            <a:off x="914400" y="3233928"/>
+            <a:off x="914400" y="3197352"/>
             <a:ext cx="10607040" cy="944880"/>
           </a:xfrm>
           <a:prstGeom prst="rect">
@@ -46936,7 +46850,7 @@
         </p:nvSpPr>
         <p:spPr>
           <a:xfrm>
-            <a:off x="585216" y="4480560"/>
+            <a:off x="585216" y="4407408"/>
             <a:ext cx="164592" cy="164592"/>
           </a:xfrm>
           <a:prstGeom prst="ellipse">
@@ -46956,7 +46870,7 @@
         </p:nvSpPr>
         <p:spPr>
           <a:xfrm>
-            <a:off x="914400" y="4288536"/>
+            <a:off x="914400" y="4215384"/>
             <a:ext cx="10607040" cy="1341120"/>
           </a:xfrm>
           <a:prstGeom prst="rect">
@@ -47302,7 +47216,7 @@
         </p:nvSpPr>
         <p:spPr>
           <a:xfrm>
-            <a:off x="585216" y="3029712"/>
+            <a:off x="585216" y="2993136"/>
             <a:ext cx="164592" cy="164592"/>
           </a:xfrm>
           <a:prstGeom prst="ellipse">
@@ -47322,7 +47236,7 @@
         </p:nvSpPr>
         <p:spPr>
           <a:xfrm>
-            <a:off x="914400" y="2837688"/>
+            <a:off x="914400" y="2801112"/>
             <a:ext cx="10607040" cy="944880"/>
           </a:xfrm>
           <a:prstGeom prst="rect">
@@ -47398,7 +47312,7 @@
         </p:nvSpPr>
         <p:spPr>
           <a:xfrm>
-            <a:off x="585216" y="4084320"/>
+            <a:off x="585216" y="4011168"/>
             <a:ext cx="164592" cy="164592"/>
           </a:xfrm>
           <a:prstGeom prst="ellipse">
@@ -47418,7 +47332,7 @@
         </p:nvSpPr>
         <p:spPr>
           <a:xfrm>
-            <a:off x="914400" y="3892296"/>
+            <a:off x="914400" y="3819144"/>
             <a:ext cx="10607040" cy="1341120"/>
           </a:xfrm>
           <a:prstGeom prst="rect">
@@ -47481,6 +47395,102 @@
                 <a:cs typeface="Alexandria" pitchFamily="34" charset="-120"/>
               </a:rPr>
               <a:t>(1), 43–61.</a:t>
+            </a:r>
+            <a:endParaRPr lang="en-US" sz="2400" dirty="0"/>
+          </a:p>
+        </p:txBody>
+      </p:sp>
+      <p:sp>
+        <p:nvSpPr>
+          <p:cNvPr id="12" name="Dấu đầu dòng"/>
+          <p:cNvSpPr/>
+          <p:nvPr/>
+        </p:nvSpPr>
+        <p:spPr>
+          <a:xfrm>
+            <a:off x="585216" y="5425440"/>
+            <a:ext cx="164592" cy="164592"/>
+          </a:xfrm>
+          <a:prstGeom prst="ellipse">
+            <a:avLst/>
+          </a:prstGeom>
+          <a:solidFill>
+            <a:srgbClr val="49B296"/>
+          </a:solidFill>
+          <a:ln/>
+        </p:spPr>
+      </p:sp>
+      <p:sp>
+        <p:nvSpPr>
+          <p:cNvPr id="13" name="Text 11"/>
+          <p:cNvSpPr txBox="1"/>
+          <p:nvPr/>
+        </p:nvSpPr>
+        <p:spPr>
+          <a:xfrm>
+            <a:off x="914400" y="5233416"/>
+            <a:ext cx="10607040" cy="944880"/>
+          </a:xfrm>
+          <a:prstGeom prst="rect">
+            <a:avLst/>
+          </a:prstGeom>
+          <a:noFill/>
+          <a:ln/>
+        </p:spPr>
+        <p:txBody>
+          <a:bodyPr wrap="square" lIns="76200" tIns="76200" rIns="76200" bIns="76200" rtlCol="0" anchor="t"/>
+          <a:lstStyle/>
+          <a:p>
+            <a:pPr algn="l" indent="0" marL="0">
+              <a:lnSpc>
+                <a:spcPts val="3100"/>
+              </a:lnSpc>
+              <a:buNone/>
+            </a:pPr>
+            <a:r>
+              <a:rPr lang="en-US" sz="2400" dirty="0">
+                <a:solidFill>
+                  <a:srgbClr val="2E2A3A"/>
+                </a:solidFill>
+                <a:latin typeface="Alexandria" pitchFamily="34" charset="0"/>
+                <a:ea typeface="Alexandria" pitchFamily="34" charset="-122"/>
+                <a:cs typeface="Alexandria" pitchFamily="34" charset="-120"/>
+              </a:rPr>
+              <a:t>Underhill, P. (2009). </a:t>
+            </a:r>
+            <a:pPr algn="l" indent="0" marL="0">
+              <a:lnSpc>
+                <a:spcPts val="3100"/>
+              </a:lnSpc>
+              <a:buNone/>
+            </a:pPr>
+            <a:r>
+              <a:rPr lang="en-US" sz="2400" i="1" dirty="0">
+                <a:solidFill>
+                  <a:srgbClr val="2E2A3A"/>
+                </a:solidFill>
+                <a:latin typeface="Alexandria" pitchFamily="34" charset="0"/>
+                <a:ea typeface="Alexandria" pitchFamily="34" charset="-122"/>
+                <a:cs typeface="Alexandria" pitchFamily="34" charset="-120"/>
+              </a:rPr>
+              <a:t>Why we buy: The science of shopping</a:t>
+            </a:r>
+            <a:pPr algn="l" indent="0" marL="0">
+              <a:lnSpc>
+                <a:spcPts val="3100"/>
+              </a:lnSpc>
+              <a:buNone/>
+            </a:pPr>
+            <a:r>
+              <a:rPr lang="en-US" sz="2400" dirty="0">
+                <a:solidFill>
+                  <a:srgbClr val="2E2A3A"/>
+                </a:solidFill>
+                <a:latin typeface="Alexandria" pitchFamily="34" charset="0"/>
+                <a:ea typeface="Alexandria" pitchFamily="34" charset="-122"/>
+                <a:cs typeface="Alexandria" pitchFamily="34" charset="-120"/>
+              </a:rPr>
+              <a:t> (Updated and revised ed.). Simon &amp; Schuster.</a:t>
             </a:r>
             <a:endParaRPr lang="en-US" sz="2400" dirty="0"/>
           </a:p>
@@ -47529,276 +47539,6 @@
             <a:fld id="{F7021451-1387-4CA6-816F-3879F97B5CBC}" type="slidenum">
               <a:rPr b="0" lang="en-US"/>
               <a:t>63</a:t>
-            </a:fld>
-            <a:endParaRPr lang="en-US"/>
-          </a:p>
-        </p:txBody>
-      </p:sp>
-    </p:spTree>
-  </p:cSld>
-  <p:clrMapOvr>
-    <a:masterClrMapping/>
-  </p:clrMapOvr>
-</p:sld>
-</file>
-
-<file path=ppt/slides/slide64.xml><?xml version="1.0" encoding="utf-8"?>
-<p:sld xmlns:a="http://schemas.openxmlformats.org/drawingml/2006/main" xmlns:r="http://schemas.openxmlformats.org/officeDocument/2006/relationships" xmlns:p="http://schemas.openxmlformats.org/presentationml/2006/main">
-  <p:cSld name="Slide 64">
-    <p:spTree>
-      <p:nvGrpSpPr>
-        <p:cNvPr id="1" name=""/>
-        <p:cNvGrpSpPr/>
-        <p:nvPr/>
-      </p:nvGrpSpPr>
-      <p:grpSpPr>
-        <a:xfrm>
-          <a:off x="0" y="0"/>
-          <a:ext cx="0" cy="0"/>
-          <a:chOff x="0" y="0"/>
-          <a:chExt cx="0" cy="0"/>
-        </a:xfrm>
-      </p:grpSpPr>
-      <p:sp>
-        <p:nvSpPr>
-          <p:cNvPr id="2" name="Trang trí"/>
-          <p:cNvSpPr/>
-          <p:nvPr/>
-        </p:nvSpPr>
-        <p:spPr>
-          <a:xfrm>
-            <a:off x="11460175" y="-731520"/>
-            <a:ext cx="1463040" cy="1463040"/>
-          </a:xfrm>
-          <a:prstGeom prst="ellipse">
-            <a:avLst/>
-          </a:prstGeom>
-          <a:solidFill>
-            <a:srgbClr val="962B7C"/>
-          </a:solidFill>
-          <a:ln/>
-        </p:spPr>
-      </p:sp>
-      <p:sp>
-        <p:nvSpPr>
-          <p:cNvPr id="3" name="Trang trí"/>
-          <p:cNvSpPr/>
-          <p:nvPr/>
-        </p:nvSpPr>
-        <p:spPr>
-          <a:xfrm>
-            <a:off x="11505895" y="868680"/>
-            <a:ext cx="274320" cy="274320"/>
-          </a:xfrm>
-          <a:prstGeom prst="ellipse">
-            <a:avLst/>
-          </a:prstGeom>
-          <a:solidFill>
-            <a:srgbClr val="49B296"/>
-          </a:solidFill>
-          <a:ln/>
-        </p:spPr>
-      </p:sp>
-      <p:sp>
-        <p:nvSpPr>
-          <p:cNvPr id="4" name="Trang trí"/>
-          <p:cNvSpPr/>
-          <p:nvPr/>
-        </p:nvSpPr>
-        <p:spPr>
-          <a:xfrm>
-            <a:off x="-457200" y="6400800"/>
-            <a:ext cx="914400" cy="914400"/>
-          </a:xfrm>
-          <a:prstGeom prst="ellipse">
-            <a:avLst/>
-          </a:prstGeom>
-          <a:solidFill>
-            <a:srgbClr val="09A1E5"/>
-          </a:solidFill>
-          <a:ln/>
-        </p:spPr>
-      </p:sp>
-      <p:sp>
-        <p:nvSpPr>
-          <p:cNvPr id="5" name="Text 0"/>
-          <p:cNvSpPr/>
-          <p:nvPr>
-            <p:ph idx="100" type="title" hasCustomPrompt="1"/>
-          </p:nvPr>
-        </p:nvSpPr>
-        <p:spPr>
-          <a:xfrm>
-            <a:off x="548640" y="365760"/>
-            <a:ext cx="10789920" cy="1280160"/>
-          </a:xfrm>
-          <a:prstGeom prst="rect">
-            <a:avLst/>
-          </a:prstGeom>
-          <a:noFill/>
-          <a:ln/>
-        </p:spPr>
-        <p:txBody>
-          <a:bodyPr wrap="square" lIns="76200" tIns="76200" rIns="76200" bIns="76200" rtlCol="0" anchor="t"/>
-          <a:lstStyle/>
-          <a:p>
-            <a:pPr algn="l" indent="0" marL="0">
-              <a:buNone/>
-            </a:pPr>
-            <a:r>
-              <a:rPr lang="en-US" sz="3600" b="1" dirty="0">
-                <a:solidFill>
-                  <a:srgbClr val="2E2A3A"/>
-                </a:solidFill>
-                <a:latin typeface="Alexandria" pitchFamily="34" charset="0"/>
-                <a:ea typeface="Alexandria" pitchFamily="34" charset="-122"/>
-                <a:cs typeface="Alexandria" pitchFamily="34" charset="-120"/>
-              </a:rPr>
-              <a:t>Tài liệu tham khảo (tiếp)</a:t>
-            </a:r>
-            <a:endParaRPr lang="en-US" sz="3600" dirty="0"/>
-          </a:p>
-        </p:txBody>
-      </p:sp>
-      <p:sp>
-        <p:nvSpPr>
-          <p:cNvPr id="6" name="Dấu đầu dòng"/>
-          <p:cNvSpPr/>
-          <p:nvPr/>
-        </p:nvSpPr>
-        <p:spPr>
-          <a:xfrm>
-            <a:off x="585216" y="1975104"/>
-            <a:ext cx="164592" cy="164592"/>
-          </a:xfrm>
-          <a:prstGeom prst="ellipse">
-            <a:avLst/>
-          </a:prstGeom>
-          <a:solidFill>
-            <a:srgbClr val="962B7C"/>
-          </a:solidFill>
-          <a:ln/>
-        </p:spPr>
-      </p:sp>
-      <p:sp>
-        <p:nvSpPr>
-          <p:cNvPr id="7" name="Text 5"/>
-          <p:cNvSpPr txBox="1"/>
-          <p:nvPr/>
-        </p:nvSpPr>
-        <p:spPr>
-          <a:xfrm>
-            <a:off x="914400" y="1783080"/>
-            <a:ext cx="10607040" cy="944880"/>
-          </a:xfrm>
-          <a:prstGeom prst="rect">
-            <a:avLst/>
-          </a:prstGeom>
-          <a:noFill/>
-          <a:ln/>
-        </p:spPr>
-        <p:txBody>
-          <a:bodyPr wrap="square" lIns="76200" tIns="76200" rIns="76200" bIns="76200" rtlCol="0" anchor="t"/>
-          <a:lstStyle/>
-          <a:p>
-            <a:pPr algn="l" indent="0" marL="0">
-              <a:lnSpc>
-                <a:spcPts val="3100"/>
-              </a:lnSpc>
-              <a:buNone/>
-            </a:pPr>
-            <a:r>
-              <a:rPr lang="en-US" sz="2400" dirty="0">
-                <a:solidFill>
-                  <a:srgbClr val="2E2A3A"/>
-                </a:solidFill>
-                <a:latin typeface="Alexandria" pitchFamily="34" charset="0"/>
-                <a:ea typeface="Alexandria" pitchFamily="34" charset="-122"/>
-                <a:cs typeface="Alexandria" pitchFamily="34" charset="-120"/>
-              </a:rPr>
-              <a:t>Underhill, P. (2009). </a:t>
-            </a:r>
-            <a:pPr algn="l" indent="0" marL="0">
-              <a:lnSpc>
-                <a:spcPts val="3100"/>
-              </a:lnSpc>
-              <a:buNone/>
-            </a:pPr>
-            <a:r>
-              <a:rPr lang="en-US" sz="2400" i="1" dirty="0">
-                <a:solidFill>
-                  <a:srgbClr val="2E2A3A"/>
-                </a:solidFill>
-                <a:latin typeface="Alexandria" pitchFamily="34" charset="0"/>
-                <a:ea typeface="Alexandria" pitchFamily="34" charset="-122"/>
-                <a:cs typeface="Alexandria" pitchFamily="34" charset="-120"/>
-              </a:rPr>
-              <a:t>Why we buy: The science of shopping</a:t>
-            </a:r>
-            <a:pPr algn="l" indent="0" marL="0">
-              <a:lnSpc>
-                <a:spcPts val="3100"/>
-              </a:lnSpc>
-              <a:buNone/>
-            </a:pPr>
-            <a:r>
-              <a:rPr lang="en-US" sz="2400" dirty="0">
-                <a:solidFill>
-                  <a:srgbClr val="2E2A3A"/>
-                </a:solidFill>
-                <a:latin typeface="Alexandria" pitchFamily="34" charset="0"/>
-                <a:ea typeface="Alexandria" pitchFamily="34" charset="-122"/>
-                <a:cs typeface="Alexandria" pitchFamily="34" charset="-120"/>
-              </a:rPr>
-              <a:t> (Updated and revised ed.). Simon &amp; Schuster.</a:t>
-            </a:r>
-            <a:endParaRPr lang="en-US" sz="2400" dirty="0"/>
-          </a:p>
-        </p:txBody>
-      </p:sp>
-      <p:sp>
-        <p:nvSpPr>
-          <p:cNvPr id="25" name="Slide Number Placeholder 0"/>
-          <p:cNvSpPr>
-            <a:spLocks noGrp="1"/>
-          </p:cNvSpPr>
-          <p:nvPr>
-            <p:ph type="sldNum" sz="quarter" idx="4294967295"/>
-          </p:nvPr>
-        </p:nvSpPr>
-        <p:spPr>
-          <a:xfrm>
-            <a:off x="10881360" y="6263640"/>
-            <a:ext cx="914400" cy="457200"/>
-          </a:xfrm>
-          <a:prstGeom prst="rect">
-            <a:avLst/>
-          </a:prstGeom>
-          <a:extLst>
-            <a:ext uri="{C572A759-6A51-4108-AA02-DFA0A04FC94B}">
-              <ma14:wrappingTextBoxFlag xmlns:ma14="http://schemas.microsoft.com/office/mac/drawingml/2011/main" val="0"/>
-            </a:ext>
-          </a:extLst>
-        </p:spPr>
-        <p:txBody>
-          <a:bodyPr/>
-          <a:lstStyle>
-            <a:lvl1pPr>
-              <a:defRPr sz="2400">
-                <a:solidFill>
-                  <a:srgbClr val="5B5668"/>
-                </a:solidFill>
-                <a:latin typeface="Alexandria"/>
-                <a:ea typeface="Alexandria"/>
-                <a:cs typeface="Alexandria"/>
-              </a:defRPr>
-            </a:lvl1pPr>
-          </a:lstStyle>
-          <a:p>
-            <a:pPr algn="r"/>
-            <a:fld id="{F7021451-1387-4CA6-816F-3879F97B5CBC}" type="slidenum">
-              <a:rPr b="0" lang="en-US"/>
-              <a:t>64</a:t>
             </a:fld>
             <a:endParaRPr lang="en-US"/>
           </a:p>
@@ -48945,7 +48685,7 @@
         <p:spPr>
           <a:xfrm>
             <a:off x="6766560" y="3482340"/>
-            <a:ext cx="4709160" cy="1010920"/>
+            <a:ext cx="4709160" cy="581660"/>
           </a:xfrm>
           <a:prstGeom prst="rect">
             <a:avLst/>
@@ -48972,7 +48712,7 @@
                 <a:ea typeface="Alexandria" pitchFamily="34" charset="-122"/>
                 <a:cs typeface="Alexandria" pitchFamily="34" charset="-120"/>
               </a:rPr>
-              <a:t>Định nghĩa, phân nhóm khác</a:t>
+              <a:t>Định nghĩa, cách chia khác</a:t>
             </a:r>
             <a:endParaRPr lang="en-US" sz="2600" dirty="0"/>
           </a:p>
@@ -48986,7 +48726,7 @@
         </p:nvSpPr>
         <p:spPr>
           <a:xfrm>
-            <a:off x="6492240" y="4829810"/>
+            <a:off x="6492240" y="4400550"/>
             <a:ext cx="182880" cy="182880"/>
           </a:xfrm>
           <a:prstGeom prst="ellipse">
@@ -49006,7 +48746,7 @@
         </p:nvSpPr>
         <p:spPr>
           <a:xfrm>
-            <a:off x="6766560" y="4630420"/>
+            <a:off x="6766560" y="4201160"/>
             <a:ext cx="4709160" cy="581660"/>
           </a:xfrm>
           <a:prstGeom prst="rect">
@@ -49048,7 +48788,7 @@
         </p:nvSpPr>
         <p:spPr>
           <a:xfrm>
-            <a:off x="6492240" y="5548630"/>
+            <a:off x="6492240" y="5119370"/>
             <a:ext cx="182880" cy="182880"/>
           </a:xfrm>
           <a:prstGeom prst="ellipse">
@@ -49068,7 +48808,7 @@
         </p:nvSpPr>
         <p:spPr>
           <a:xfrm>
-            <a:off x="6766560" y="5349240"/>
+            <a:off x="6766560" y="4919980"/>
             <a:ext cx="4709160" cy="581660"/>
           </a:xfrm>
           <a:prstGeom prst="rect">

--- a/mkt1107/output/MKT1107_W07_slides.pptx
+++ b/mkt1107/output/MKT1107_W07_slides.pptx
@@ -169,19 +169,19 @@
   <p:extLst>
     <p:ext uri="{521415D9-36F7-43E2-AB2F-B90AF26B5E84}">
       <p14:sectionLst xmlns:p14="http://schemas.microsoft.com/office/powerpoint/2010/main">
-        <p14:section name="Mở đầu" id="{1e899977-b9fa-2631-2c9c-6d253dc23e5b}">
+        <p14:section name="Mở đầu" id="{ee01e43b-0df1-29e3-2265-3e4cce3c9ecf}">
           <p14:sldIdLst>
             <p14:sldId id="256"/>
           </p14:sldIdLst>
         </p14:section>
-        <p14:section name="S1 · Khởi động — chữa nhanh đề cương M4" id="{60d87e30-3ec3-52e1-91de-334f5b966d81}">
+        <p14:section name="S1 · Khởi động — chữa nhanh đề cương M4" id="{b16d46bc-b0fe-1572-f3d2-c6678eeb22ca}">
           <p14:sldIdLst>
             <p14:sldId id="257"/>
             <p14:sldId id="258"/>
             <p14:sldId id="259"/>
           </p14:sldIdLst>
         </p14:section>
-        <p14:section name="S2 · 5.1 Dữ liệu thứ cấp" id="{083e9db3-f6a6-5f82-a9d2-3a68c66daf07}">
+        <p14:section name="S2 · 5.1 Dữ liệu thứ cấp" id="{a118080b-c582-c5c1-7b7d-e8183025952a}">
           <p14:sldIdLst>
             <p14:sldId id="260"/>
             <p14:sldId id="261"/>
@@ -199,7 +199,7 @@
             <p14:sldId id="273"/>
           </p14:sldIdLst>
         </p14:section>
-        <p14:section name="S3 · Kiểm tra nhanh: soi một con số" id="{bc80fe7a-2bae-671b-a923-fb8ed976b854}">
+        <p14:section name="S3 · Kiểm tra nhanh: soi một con số" id="{985dec2d-2693-17b4-b3e5-e72c03600e52}">
           <p14:sldIdLst>
             <p14:sldId id="274"/>
             <p14:sldId id="275"/>
@@ -208,7 +208,7 @@
             <p14:sldId id="278"/>
           </p14:sldIdLst>
         </p14:section>
-        <p14:section name="S4 · Dữ liệu sơ cấp — quan sát và dân tộc học" id="{e4b27375-a4a2-399c-effc-7fe18715e2a5}">
+        <p14:section name="S4 · Dữ liệu sơ cấp — quan sát và dân tộc học" id="{c1239f8b-2034-93ca-20ec-a59494eb4971}">
           <p14:sldIdLst>
             <p14:sldId id="279"/>
             <p14:sldId id="280"/>
@@ -223,7 +223,7 @@
             <p14:sldId id="289"/>
           </p14:sldIdLst>
         </p14:section>
-        <p14:section name="S5 · Thảo luận nhóm và phỏng vấn sâu" id="{6eacd6e3-08dd-14b4-bcc6-28a8b6f0916f}">
+        <p14:section name="S5 · Thảo luận nhóm và phỏng vấn sâu" id="{f761715b-6185-6d4a-7124-b4574a636786}">
           <p14:sldIdLst>
             <p14:sldId id="290"/>
             <p14:sldId id="291"/>
@@ -237,7 +237,7 @@
             <p14:sldId id="299"/>
           </p14:sldIdLst>
         </p14:section>
-        <p14:section name="S6 · Nghiên cứu định lượng" id="{463f99be-6ecc-fd96-e81c-d94fd90ff689}">
+        <p14:section name="S6 · Nghiên cứu định lượng" id="{f8dfa45b-515f-069d-9521-30d90fb1945e}">
           <p14:sldIdLst>
             <p14:sldId id="300"/>
             <p14:sldId id="301"/>
@@ -248,7 +248,7 @@
             <p14:sldId id="306"/>
           </p14:sldIdLst>
         </p14:section>
-        <p14:section name="S7 · Hỗn hợp, chọn phương pháp, đạo đức" id="{03c4a961-8ba8-c1eb-098d-702b2fc0d3f0}">
+        <p14:section name="S7 · Hỗn hợp, chọn phương pháp, đạo đức" id="{9994308e-da9d-e366-35d9-54ce9334afac}">
           <p14:sldIdLst>
             <p14:sldId id="307"/>
             <p14:sldId id="308"/>
@@ -257,13 +257,13 @@
             <p14:sldId id="311"/>
           </p14:sldIdLst>
         </p14:section>
-        <p14:section name="S8 · Thực hành nhóm: Xưởng phương pháp" id="{9980011f-8d04-e65d-d25b-1e792536cd8f}">
+        <p14:section name="S8 · Thực hành nhóm: Xưởng phương pháp" id="{6c995aa9-9e77-7952-4fa5-7d2a12bda874}">
           <p14:sldIdLst>
             <p14:sldId id="312"/>
             <p14:sldId id="313"/>
           </p14:sldIdLst>
         </p14:section>
-        <p14:section name="S9 · Kết buổi" id="{f65d64ce-fffc-3967-7ba0-dee0ed712cdf}">
+        <p14:section name="S9 · Kết buổi" id="{23f47134-aa60-1f66-994e-bc660a2257a4}">
           <p14:sldIdLst>
             <p14:sldId id="314"/>
             <p14:sldId id="315"/>
@@ -14002,7 +14002,7 @@
         <p:spPr>
           <a:xfrm>
             <a:off x="777240" y="2011680"/>
-            <a:ext cx="2377440" cy="566928"/>
+            <a:ext cx="2581656" cy="566928"/>
           </a:xfrm>
           <a:prstGeom prst="roundRect">
             <a:avLst>
@@ -14024,7 +14024,7 @@
         <p:spPr>
           <a:xfrm>
             <a:off x="777240" y="2011680"/>
-            <a:ext cx="2377440" cy="566928"/>
+            <a:ext cx="2581656" cy="566928"/>
           </a:xfrm>
           <a:prstGeom prst="rect">
             <a:avLst/>

--- a/mkt1107/output/MKT1107_W07_slides.pptx
+++ b/mkt1107/output/MKT1107_W07_slides.pptx
@@ -169,19 +169,19 @@
   <p:extLst>
     <p:ext uri="{521415D9-36F7-43E2-AB2F-B90AF26B5E84}">
       <p14:sectionLst xmlns:p14="http://schemas.microsoft.com/office/powerpoint/2010/main">
-        <p14:section name="Mở đầu" id="{ee01e43b-0df1-29e3-2265-3e4cce3c9ecf}">
+        <p14:section name="Mở đầu" id="{cde3464b-4a26-ec64-7023-523ae87c126a}">
           <p14:sldIdLst>
             <p14:sldId id="256"/>
           </p14:sldIdLst>
         </p14:section>
-        <p14:section name="S1 · Khởi động — chữa nhanh đề cương M4" id="{b16d46bc-b0fe-1572-f3d2-c6678eeb22ca}">
+        <p14:section name="S1 · Khởi động — chữa nhanh đề cương M4" id="{4fa56a5d-cba7-9c98-98e6-6deaacc534c1}">
           <p14:sldIdLst>
             <p14:sldId id="257"/>
             <p14:sldId id="258"/>
             <p14:sldId id="259"/>
           </p14:sldIdLst>
         </p14:section>
-        <p14:section name="S2 · 5.1 Dữ liệu thứ cấp" id="{a118080b-c582-c5c1-7b7d-e8183025952a}">
+        <p14:section name="S2 · 5.1 Dữ liệu thứ cấp" id="{7f19365d-9db0-ee90-d257-6f5180adb3d9}">
           <p14:sldIdLst>
             <p14:sldId id="260"/>
             <p14:sldId id="261"/>
@@ -199,7 +199,7 @@
             <p14:sldId id="273"/>
           </p14:sldIdLst>
         </p14:section>
-        <p14:section name="S3 · Kiểm tra nhanh: soi một con số" id="{985dec2d-2693-17b4-b3e5-e72c03600e52}">
+        <p14:section name="S3 · Kiểm tra nhanh: soi một con số" id="{975fd038-a6c5-382c-c1c3-d9d664a59d40}">
           <p14:sldIdLst>
             <p14:sldId id="274"/>
             <p14:sldId id="275"/>
@@ -208,7 +208,7 @@
             <p14:sldId id="278"/>
           </p14:sldIdLst>
         </p14:section>
-        <p14:section name="S4 · Dữ liệu sơ cấp — quan sát và dân tộc học" id="{c1239f8b-2034-93ca-20ec-a59494eb4971}">
+        <p14:section name="S4 · Dữ liệu sơ cấp — quan sát và dân tộc học" id="{781f70bb-58b6-d16d-8ce3-1bf781721323}">
           <p14:sldIdLst>
             <p14:sldId id="279"/>
             <p14:sldId id="280"/>
@@ -223,7 +223,7 @@
             <p14:sldId id="289"/>
           </p14:sldIdLst>
         </p14:section>
-        <p14:section name="S5 · Thảo luận nhóm và phỏng vấn sâu" id="{f761715b-6185-6d4a-7124-b4574a636786}">
+        <p14:section name="S5 · Thảo luận nhóm và phỏng vấn sâu" id="{579ffaf3-dd16-9d09-7d07-6a69a51bd2e9}">
           <p14:sldIdLst>
             <p14:sldId id="290"/>
             <p14:sldId id="291"/>
@@ -237,7 +237,7 @@
             <p14:sldId id="299"/>
           </p14:sldIdLst>
         </p14:section>
-        <p14:section name="S6 · Nghiên cứu định lượng" id="{f8dfa45b-515f-069d-9521-30d90fb1945e}">
+        <p14:section name="S6 · Nghiên cứu định lượng" id="{b670dcbe-875a-1909-dcc8-f53be70c2807}">
           <p14:sldIdLst>
             <p14:sldId id="300"/>
             <p14:sldId id="301"/>
@@ -248,7 +248,7 @@
             <p14:sldId id="306"/>
           </p14:sldIdLst>
         </p14:section>
-        <p14:section name="S7 · Hỗn hợp, chọn phương pháp, đạo đức" id="{9994308e-da9d-e366-35d9-54ce9334afac}">
+        <p14:section name="S7 · Hỗn hợp, chọn phương pháp, đạo đức" id="{836406ed-cb6b-9af6-0573-81c599008b2d}">
           <p14:sldIdLst>
             <p14:sldId id="307"/>
             <p14:sldId id="308"/>
@@ -257,13 +257,13 @@
             <p14:sldId id="311"/>
           </p14:sldIdLst>
         </p14:section>
-        <p14:section name="S8 · Thực hành nhóm: Xưởng phương pháp" id="{6c995aa9-9e77-7952-4fa5-7d2a12bda874}">
+        <p14:section name="S8 · Thực hành nhóm: Xưởng phương pháp" id="{9dba5155-2f93-5421-d616-a2eb87c4d321}">
           <p14:sldIdLst>
             <p14:sldId id="312"/>
             <p14:sldId id="313"/>
           </p14:sldIdLst>
         </p14:section>
-        <p14:section name="S9 · Kết buổi" id="{23f47134-aa60-1f66-994e-bc660a2257a4}">
+        <p14:section name="S9 · Kết buổi" id="{2533cbe7-76e3-ed53-e156-d97b20293afb}">
           <p14:sldIdLst>
             <p14:sldId id="314"/>
             <p14:sldId id="315"/>
@@ -8816,7 +8816,7 @@
                 <a:ea typeface="Alexandria" pitchFamily="34" charset="-122"/>
                 <a:cs typeface="Alexandria" pitchFamily="34" charset="-120"/>
               </a:rPr>
-              <a:t>Hiệp hội ngành hàng</a:t>
+              <a:t>Hiệp hội ngành hàng</a:t>
             </a:r>
             <a:endParaRPr lang="en-US" sz="2400" dirty="0"/>
           </a:p>
@@ -11896,7 +11896,7 @@
                 <a:ea typeface="Alexandria" pitchFamily="34" charset="-122"/>
                 <a:cs typeface="Alexandria" pitchFamily="34" charset="-120"/>
               </a:rPr>
-              <a:t>Lợi ích thương mại?</a:t>
+              <a:t>Lợi ích thương mại?</a:t>
             </a:r>
             <a:endParaRPr lang="en-US" sz="2600" dirty="0"/>
           </a:p>
@@ -12061,7 +12061,7 @@
                 <a:ea typeface="Alexandria" pitchFamily="34" charset="-122"/>
                 <a:cs typeface="Alexandria" pitchFamily="34" charset="-120"/>
               </a:rPr>
-              <a:t>Mẫu, cách hỏi, năm</a:t>
+              <a:t>Mẫu, cách hỏi, năm</a:t>
             </a:r>
             <a:endParaRPr lang="en-US" sz="2600" dirty="0"/>
           </a:p>
@@ -12226,7 +12226,7 @@
                 <a:ea typeface="Alexandria" pitchFamily="34" charset="-122"/>
                 <a:cs typeface="Alexandria" pitchFamily="34" charset="-120"/>
               </a:rPr>
-              <a:t>Nguồn độc lập</a:t>
+              <a:t>Nguồn độc lập</a:t>
             </a:r>
             <a:endParaRPr lang="en-US" sz="2600" dirty="0"/>
           </a:p>
@@ -16000,7 +16000,7 @@
                 <a:ea typeface="Alexandria" pitchFamily="34" charset="-122"/>
                 <a:cs typeface="Alexandria" pitchFamily="34" charset="-120"/>
               </a:rPr>
-              <a:t>Dùng được, có điều kiện, hay bỏ? Tiêu chuẩn nào?</a:t>
+              <a:t>Dùng được, có điều kiện, hay bỏ? Tiêu chuẩn nào?</a:t>
             </a:r>
             <a:endParaRPr lang="en-US" sz="3000" dirty="0"/>
           </a:p>
@@ -16305,7 +16305,7 @@
                 <a:ea typeface="Alexandria" pitchFamily="34" charset="-122"/>
                 <a:cs typeface="Alexandria" pitchFamily="34" charset="-120"/>
               </a:rPr>
-              <a:t>Báo cáo của một công ty nghiên cứu thị trường, công bố cách đây khoảng 7 năm.</a:t>
+              <a:t>Báo cáo của một công ty nghiên cứu thị trường, công bố cách đây khoảng 7 năm.</a:t>
             </a:r>
             <a:endParaRPr lang="en-US" sz="2500" dirty="0"/>
           </a:p>
@@ -16902,7 +16902,7 @@
                 <a:ea typeface="Alexandria" pitchFamily="34" charset="-122"/>
                 <a:cs typeface="Alexandria" pitchFamily="34" charset="-120"/>
               </a:rPr>
-              <a:t>Dùng được, có điều kiện, hay bỏ? Còn cần làm gì?</a:t>
+              <a:t>Dùng được, có điều kiện, hay bỏ? Còn cần làm gì?</a:t>
             </a:r>
             <a:endParaRPr lang="en-US" sz="3000" dirty="0"/>
           </a:p>
@@ -24263,7 +24263,7 @@
                 <a:ea typeface="Alexandria" pitchFamily="34" charset="-122"/>
                 <a:cs typeface="Alexandria" pitchFamily="34" charset="-120"/>
               </a:rPr>
-              <a:t>Dân tộc học: hòa mình vào môi trường tự nhiên của khách hàng, quan sát và trò chuyện.</a:t>
+              <a:t>Dân tộc học: hòa mình vào môi trường tự nhiên của khách hàng, quan sát và trò chuyện.</a:t>
             </a:r>
             <a:endParaRPr lang="en-US" sz="2400" dirty="0"/>
           </a:p>
@@ -24877,7 +24877,7 @@
                 <a:ea typeface="Alexandria" pitchFamily="34" charset="-122"/>
                 <a:cs typeface="Alexandria" pitchFamily="34" charset="-120"/>
               </a:rPr>
-              <a:t>Trong khảo sát, thảo luận nhóm</a:t>
+              <a:t>Trong khảo sát, thảo luận nhóm</a:t>
             </a:r>
             <a:endParaRPr lang="en-US" sz="2600" dirty="0"/>
           </a:p>
@@ -28291,7 +28291,7 @@
       </p:sp>
       <p:sp>
         <p:nvSpPr>
-          <p:cNvPr id="6" name="Thẻ Thí nghiệm Asch"/>
+          <p:cNvPr id="6" name="Thẻ Asch (1956)"/>
           <p:cNvSpPr/>
           <p:nvPr/>
         </p:nvSpPr>
@@ -28379,7 +28379,7 @@
         <p:spPr>
           <a:xfrm>
             <a:off x="1371600" y="1920240"/>
-            <a:ext cx="2499360" cy="1076960"/>
+            <a:ext cx="2499360" cy="614680"/>
           </a:xfrm>
           <a:prstGeom prst="rect">
             <a:avLst/>
@@ -28406,7 +28406,7 @@
                 <a:ea typeface="Alexandria" pitchFamily="34" charset="-122"/>
                 <a:cs typeface="Alexandria" pitchFamily="34" charset="-120"/>
               </a:rPr>
-              <a:t>Thí nghiệm Asch</a:t>
+              <a:t>Asch (1956)</a:t>
             </a:r>
             <a:endParaRPr lang="en-US" sz="2800" dirty="0"/>
           </a:p>
@@ -28420,8 +28420,8 @@
         </p:nvSpPr>
         <p:spPr>
           <a:xfrm>
-            <a:off x="685800" y="3042920"/>
-            <a:ext cx="3230880" cy="2032000"/>
+            <a:off x="685800" y="2580640"/>
+            <a:ext cx="3230880" cy="2494280"/>
           </a:xfrm>
           <a:prstGeom prst="rect">
             <a:avLst/>
@@ -28448,7 +28448,7 @@
                 <a:ea typeface="Alexandria" pitchFamily="34" charset="-122"/>
                 <a:cs typeface="Alexandria" pitchFamily="34" charset="-120"/>
               </a:rPr>
-              <a:t>Câu hỏi dễ, nhưng nhiều người theo đáp án sai của số đông (Asch, 1956)</a:t>
+              <a:t>Thí nghiệm: câu hỏi dễ, nhưng nhiều người theo đáp án sai của số đông</a:t>
             </a:r>
             <a:endParaRPr lang="en-US" sz="2600" dirty="0"/>
           </a:p>
@@ -28456,7 +28456,7 @@
       </p:sp>
       <p:sp>
         <p:nvSpPr>
-          <p:cNvPr id="11" name="Thẻ Trong thảo luận"/>
+          <p:cNvPr id="11" name="Thẻ Mở lời"/>
           <p:cNvSpPr/>
           <p:nvPr/>
         </p:nvSpPr>
@@ -28544,7 +28544,7 @@
         <p:spPr>
           <a:xfrm>
             <a:off x="5151120" y="1920240"/>
-            <a:ext cx="2499360" cy="1076960"/>
+            <a:ext cx="2499360" cy="614680"/>
           </a:xfrm>
           <a:prstGeom prst="rect">
             <a:avLst/>
@@ -28571,7 +28571,7 @@
                 <a:ea typeface="Alexandria" pitchFamily="34" charset="-122"/>
                 <a:cs typeface="Alexandria" pitchFamily="34" charset="-120"/>
               </a:rPr>
-              <a:t>Trong thảo luận</a:t>
+              <a:t>Mở lời</a:t>
             </a:r>
             <a:endParaRPr lang="en-US" sz="2800" dirty="0"/>
           </a:p>
@@ -28585,8 +28585,8 @@
         </p:nvSpPr>
         <p:spPr>
           <a:xfrm>
-            <a:off x="4465320" y="3042920"/>
-            <a:ext cx="3230880" cy="2032000"/>
+            <a:off x="4465320" y="2580640"/>
+            <a:ext cx="3230880" cy="2494280"/>
           </a:xfrm>
           <a:prstGeom prst="rect">
             <a:avLst/>
@@ -28613,7 +28613,7 @@
                 <a:ea typeface="Alexandria" pitchFamily="34" charset="-122"/>
                 <a:cs typeface="Alexandria" pitchFamily="34" charset="-120"/>
               </a:rPr>
-              <a:t>Người nói đầu tiên đặt “tông” cho cả nhóm</a:t>
+              <a:t>Người nói đầu tiên đặt “tông” cho cả nhóm</a:t>
             </a:r>
             <a:endParaRPr lang="en-US" sz="2600" dirty="0"/>
           </a:p>
@@ -29570,7 +29570,7 @@
                 <a:ea typeface="Alexandria" pitchFamily="34" charset="-122"/>
                 <a:cs typeface="Alexandria" pitchFamily="34" charset="-120"/>
               </a:rPr>
-              <a:t>Khảo sát, nhóm cố định, thử nghiệm</a:t>
+              <a:t>Khảo sát, nhóm cố định, thử nghiệm</a:t>
             </a:r>
             <a:endParaRPr lang="en-US" sz="2500" dirty="0"/>
           </a:p>
@@ -36910,7 +36910,7 @@
                 <a:ea typeface="Alexandria" pitchFamily="34" charset="-122"/>
                 <a:cs typeface="Alexandria" pitchFamily="34" charset="-120"/>
               </a:rPr>
-              <a:t>Chia ngẫu nhiên</a:t>
+              <a:t>Chia ngẫu nhiên</a:t>
             </a:r>
             <a:endParaRPr lang="en-US" sz="2800" dirty="0"/>
           </a:p>
@@ -37075,7 +37075,7 @@
                 <a:ea typeface="Alexandria" pitchFamily="34" charset="-122"/>
                 <a:cs typeface="Alexandria" pitchFamily="34" charset="-120"/>
               </a:rPr>
-              <a:t>Nhóm thử nghiệm</a:t>
+              <a:t>Nhóm thử nghiệm</a:t>
             </a:r>
             <a:endParaRPr lang="en-US" sz="2800" dirty="0"/>
           </a:p>
@@ -37240,7 +37240,7 @@
                 <a:ea typeface="Alexandria" pitchFamily="34" charset="-122"/>
                 <a:cs typeface="Alexandria" pitchFamily="34" charset="-120"/>
               </a:rPr>
-              <a:t>Nhóm đối chứng</a:t>
+              <a:t>Nhóm đối chứng</a:t>
             </a:r>
             <a:endParaRPr lang="en-US" sz="2800" dirty="0"/>
           </a:p>
@@ -37447,7 +37447,7 @@
                 <a:ea typeface="Alexandria" pitchFamily="34" charset="-122"/>
                 <a:cs typeface="Alexandria" pitchFamily="34" charset="-120"/>
               </a:rPr>
-              <a:t>Kết quả hai nhóm</a:t>
+              <a:t>Kết quả hai nhóm</a:t>
             </a:r>
             <a:endParaRPr lang="en-US" sz="2600" dirty="0"/>
           </a:p>
@@ -38216,7 +38216,7 @@
                 <a:ea typeface="Alexandria" pitchFamily="34" charset="-122"/>
                 <a:cs typeface="Alexandria" pitchFamily="34" charset="-120"/>
               </a:rPr>
-              <a:t>Giám đốc kết luận: “Giảm giá hiệu quả!”</a:t>
+              <a:t>Giám đốc kết luận: “Giảm giá hiệu quả!”</a:t>
             </a:r>
             <a:endParaRPr lang="en-US" sz="2800" dirty="0"/>
           </a:p>
@@ -38521,7 +38521,7 @@
       </p:sp>
       <p:sp>
         <p:nvSpPr>
-          <p:cNvPr id="6" name="Thẻ Đi cùng nhau"/>
+          <p:cNvPr id="6" name="Thẻ Tương quan"/>
           <p:cNvSpPr/>
           <p:nvPr/>
         </p:nvSpPr>
@@ -38609,7 +38609,7 @@
         <p:spPr>
           <a:xfrm>
             <a:off x="1371600" y="1920240"/>
-            <a:ext cx="2499360" cy="1076960"/>
+            <a:ext cx="2499360" cy="614680"/>
           </a:xfrm>
           <a:prstGeom prst="rect">
             <a:avLst/>
@@ -38636,7 +38636,7 @@
                 <a:ea typeface="Alexandria" pitchFamily="34" charset="-122"/>
                 <a:cs typeface="Alexandria" pitchFamily="34" charset="-120"/>
               </a:rPr>
-              <a:t>Đi cùng nhau</a:t>
+              <a:t>Tương quan</a:t>
             </a:r>
             <a:endParaRPr lang="en-US" sz="2800" dirty="0"/>
           </a:p>
@@ -38650,8 +38650,8 @@
         </p:nvSpPr>
         <p:spPr>
           <a:xfrm>
-            <a:off x="685800" y="3042920"/>
-            <a:ext cx="3230880" cy="1897380"/>
+            <a:off x="685800" y="2580640"/>
+            <a:ext cx="3230880" cy="2359660"/>
           </a:xfrm>
           <a:prstGeom prst="rect">
             <a:avLst/>
@@ -38678,7 +38678,7 @@
                 <a:ea typeface="Alexandria" pitchFamily="34" charset="-122"/>
                 <a:cs typeface="Alexandria" pitchFamily="34" charset="-120"/>
               </a:rPr>
-              <a:t>Hai yếu tố có tương quan</a:t>
+              <a:t>Hai yếu tố thay đổi cùng nhau</a:t>
             </a:r>
             <a:endParaRPr lang="en-US" sz="2600" dirty="0"/>
           </a:p>
@@ -38851,7 +38851,7 @@
       </p:sp>
       <p:sp>
         <p:nvSpPr>
-          <p:cNvPr id="16" name="Thẻ Loại trừ cái khác"/>
+          <p:cNvPr id="16" name="Thẻ Loại trừ cái khác"/>
           <p:cNvSpPr/>
           <p:nvPr/>
         </p:nvSpPr>
@@ -38966,7 +38966,7 @@
                 <a:ea typeface="Alexandria" pitchFamily="34" charset="-122"/>
                 <a:cs typeface="Alexandria" pitchFamily="34" charset="-120"/>
               </a:rPr>
-              <a:t>Loại trừ cái khác</a:t>
+              <a:t>Loại trừ cái khác</a:t>
             </a:r>
             <a:endParaRPr lang="en-US" sz="2800" dirty="0"/>
           </a:p>
@@ -39978,7 +39978,7 @@
                 <a:ea typeface="Alexandria" pitchFamily="34" charset="-122"/>
                 <a:cs typeface="Alexandria" pitchFamily="34" charset="-120"/>
               </a:rPr>
-              <a:t>Khảo sát mẫu lớn, kiểm tra trên diện rộng</a:t>
+              <a:t>Khảo sát mẫu lớn, kiểm tra trên diện rộng</a:t>
             </a:r>
             <a:endParaRPr lang="en-US" sz="2600" dirty="0"/>
           </a:p>
@@ -40143,7 +40143,7 @@
                 <a:ea typeface="Alexandria" pitchFamily="34" charset="-122"/>
                 <a:cs typeface="Alexandria" pitchFamily="34" charset="-120"/>
               </a:rPr>
-              <a:t>Giải thích kết quả bất ngờ của khảo sát</a:t>
+              <a:t>Giải thích kết quả bất ngờ của khảo sát</a:t>
             </a:r>
             <a:endParaRPr lang="en-US" sz="2600" dirty="0"/>
           </a:p>
@@ -45179,7 +45179,7 @@
                 <a:ea typeface="Alexandria" pitchFamily="34" charset="-122"/>
                 <a:cs typeface="Alexandria" pitchFamily="34" charset="-120"/>
               </a:rPr>
-              <a:t>Định lượng: khảo sát, nhóm cố định, thử nghiệm</a:t>
+              <a:t>Định lượng: khảo sát, nhóm cố định, thử nghiệm</a:t>
             </a:r>
             <a:endParaRPr lang="en-US" sz="2700" dirty="0"/>
           </a:p>
@@ -46182,7 +46182,7 @@
                 <a:ea typeface="Alexandria" pitchFamily="34" charset="-122"/>
                 <a:cs typeface="Alexandria" pitchFamily="34" charset="-120"/>
               </a:rPr>
-              <a:t>Khoảng 1 trang: nguồn, phương pháp, lý do, đạo đức</a:t>
+              <a:t>Khoảng 1 trang: nguồn, phương pháp, lý do, đạo đức</a:t>
             </a:r>
             <a:endParaRPr lang="en-US" sz="2600" dirty="0"/>
           </a:p>

--- a/mkt1107/output/MKT1107_W07_slides.pptx
+++ b/mkt1107/output/MKT1107_W07_slides.pptx
@@ -169,19 +169,19 @@
   <p:extLst>
     <p:ext uri="{521415D9-36F7-43E2-AB2F-B90AF26B5E84}">
       <p14:sectionLst xmlns:p14="http://schemas.microsoft.com/office/powerpoint/2010/main">
-        <p14:section name="Mở đầu" id="{cde3464b-4a26-ec64-7023-523ae87c126a}">
+        <p14:section name="Mở đầu" id="{80626ff8-1c5e-1fb7-a7da-615b912a3b97}">
           <p14:sldIdLst>
             <p14:sldId id="256"/>
           </p14:sldIdLst>
         </p14:section>
-        <p14:section name="S1 · Khởi động — chữa nhanh đề cương M4" id="{4fa56a5d-cba7-9c98-98e6-6deaacc534c1}">
+        <p14:section name="S1 · Khởi động — chữa nhanh đề cương M4" id="{79733482-30c9-704c-17f6-449b28e0c2c4}">
           <p14:sldIdLst>
             <p14:sldId id="257"/>
             <p14:sldId id="258"/>
             <p14:sldId id="259"/>
           </p14:sldIdLst>
         </p14:section>
-        <p14:section name="S2 · 5.1 Dữ liệu thứ cấp" id="{7f19365d-9db0-ee90-d257-6f5180adb3d9}">
+        <p14:section name="S2 · 5.1 Dữ liệu thứ cấp" id="{2ae61acf-9823-81ca-5b11-f648208c8dda}">
           <p14:sldIdLst>
             <p14:sldId id="260"/>
             <p14:sldId id="261"/>
@@ -199,7 +199,7 @@
             <p14:sldId id="273"/>
           </p14:sldIdLst>
         </p14:section>
-        <p14:section name="S3 · Kiểm tra nhanh: soi một con số" id="{975fd038-a6c5-382c-c1c3-d9d664a59d40}">
+        <p14:section name="S3 · Kiểm tra nhanh: soi một con số" id="{e678c5c5-57bc-fc29-6703-56e2892b532e}">
           <p14:sldIdLst>
             <p14:sldId id="274"/>
             <p14:sldId id="275"/>
@@ -208,7 +208,7 @@
             <p14:sldId id="278"/>
           </p14:sldIdLst>
         </p14:section>
-        <p14:section name="S4 · Dữ liệu sơ cấp — quan sát và dân tộc học" id="{781f70bb-58b6-d16d-8ce3-1bf781721323}">
+        <p14:section name="S4 · Dữ liệu sơ cấp — quan sát và dân tộc học" id="{672ecacd-5e6e-3278-239a-1fbcd32c92d7}">
           <p14:sldIdLst>
             <p14:sldId id="279"/>
             <p14:sldId id="280"/>
@@ -223,7 +223,7 @@
             <p14:sldId id="289"/>
           </p14:sldIdLst>
         </p14:section>
-        <p14:section name="S5 · Thảo luận nhóm và phỏng vấn sâu" id="{579ffaf3-dd16-9d09-7d07-6a69a51bd2e9}">
+        <p14:section name="S5 · Thảo luận nhóm và phỏng vấn sâu" id="{afe6fa6f-3585-3014-cafb-9deb461ab72c}">
           <p14:sldIdLst>
             <p14:sldId id="290"/>
             <p14:sldId id="291"/>
@@ -237,7 +237,7 @@
             <p14:sldId id="299"/>
           </p14:sldIdLst>
         </p14:section>
-        <p14:section name="S6 · Nghiên cứu định lượng" id="{b670dcbe-875a-1909-dcc8-f53be70c2807}">
+        <p14:section name="S6 · Nghiên cứu định lượng" id="{e3094bc7-9def-2e51-6bef-be3030c5e36e}">
           <p14:sldIdLst>
             <p14:sldId id="300"/>
             <p14:sldId id="301"/>
@@ -248,7 +248,7 @@
             <p14:sldId id="306"/>
           </p14:sldIdLst>
         </p14:section>
-        <p14:section name="S7 · Hỗn hợp, chọn phương pháp, đạo đức" id="{836406ed-cb6b-9af6-0573-81c599008b2d}">
+        <p14:section name="S7 · Hỗn hợp, chọn phương pháp, đạo đức" id="{3d4e291c-7f98-20b7-8346-0a9a675f1aa9}">
           <p14:sldIdLst>
             <p14:sldId id="307"/>
             <p14:sldId id="308"/>
@@ -257,13 +257,13 @@
             <p14:sldId id="311"/>
           </p14:sldIdLst>
         </p14:section>
-        <p14:section name="S8 · Thực hành nhóm: Xưởng phương pháp" id="{9dba5155-2f93-5421-d616-a2eb87c4d321}">
+        <p14:section name="S8 · Thực hành nhóm: Xưởng phương pháp" id="{611e12e0-1253-b220-4e8d-7bb9f98f7b3e}">
           <p14:sldIdLst>
             <p14:sldId id="312"/>
             <p14:sldId id="313"/>
           </p14:sldIdLst>
         </p14:section>
-        <p14:section name="S9 · Kết buổi" id="{2533cbe7-76e3-ed53-e156-d97b20293afb}">
+        <p14:section name="S9 · Kết buổi" id="{b7cd48ad-1daa-3b7e-21f8-5e5a3c60ede1}">
           <p14:sldIdLst>
             <p14:sldId id="314"/>
             <p14:sldId id="315"/>
@@ -32692,9 +32692,9 @@
             <a:tbl>
               <a:tblPr/>
               <a:tblGrid>
-                <a:gridCol w="3286419"/>
-                <a:gridCol w="3794609"/>
-                <a:gridCol w="3983212"/>
+                <a:gridCol w="3327211"/>
+                <a:gridCol w="3774708"/>
+                <a:gridCol w="3962322"/>
               </a:tblGrid>
               <a:tr h="524256">
                 <a:tc>

--- a/mkt1107/output/MKT1107_W07_slides.pptx
+++ b/mkt1107/output/MKT1107_W07_slides.pptx
@@ -169,19 +169,19 @@
   <p:extLst>
     <p:ext uri="{521415D9-36F7-43E2-AB2F-B90AF26B5E84}">
       <p14:sectionLst xmlns:p14="http://schemas.microsoft.com/office/powerpoint/2010/main">
-        <p14:section name="Mở đầu" id="{80626ff8-1c5e-1fb7-a7da-615b912a3b97}">
+        <p14:section name="Mở đầu" id="{fac72e46-877a-7e51-e0b4-a89b3dd4a623}">
           <p14:sldIdLst>
             <p14:sldId id="256"/>
           </p14:sldIdLst>
         </p14:section>
-        <p14:section name="S1 · Khởi động — chữa nhanh đề cương M4" id="{79733482-30c9-704c-17f6-449b28e0c2c4}">
+        <p14:section name="S1 · Khởi động — chữa nhanh đề cương M4" id="{c7b93e76-d4d5-d994-e14c-4eb71345b37d}">
           <p14:sldIdLst>
             <p14:sldId id="257"/>
             <p14:sldId id="258"/>
             <p14:sldId id="259"/>
           </p14:sldIdLst>
         </p14:section>
-        <p14:section name="S2 · 5.1 Dữ liệu thứ cấp" id="{2ae61acf-9823-81ca-5b11-f648208c8dda}">
+        <p14:section name="S2 · 5.1 Dữ liệu thứ cấp" id="{c76c8dca-48a1-9065-e92a-017902c8166e}">
           <p14:sldIdLst>
             <p14:sldId id="260"/>
             <p14:sldId id="261"/>
@@ -199,7 +199,7 @@
             <p14:sldId id="273"/>
           </p14:sldIdLst>
         </p14:section>
-        <p14:section name="S3 · Kiểm tra nhanh: soi một con số" id="{e678c5c5-57bc-fc29-6703-56e2892b532e}">
+        <p14:section name="S3 · Kiểm tra nhanh: soi một con số" id="{f2671bdb-2259-2af9-e397-0dfbab45b382}">
           <p14:sldIdLst>
             <p14:sldId id="274"/>
             <p14:sldId id="275"/>
@@ -208,7 +208,7 @@
             <p14:sldId id="278"/>
           </p14:sldIdLst>
         </p14:section>
-        <p14:section name="S4 · Dữ liệu sơ cấp — quan sát và dân tộc học" id="{672ecacd-5e6e-3278-239a-1fbcd32c92d7}">
+        <p14:section name="S4 · Dữ liệu sơ cấp — quan sát và dân tộc học" id="{757f0f73-4ca7-d269-88cc-68e054948bec}">
           <p14:sldIdLst>
             <p14:sldId id="279"/>
             <p14:sldId id="280"/>
@@ -223,7 +223,7 @@
             <p14:sldId id="289"/>
           </p14:sldIdLst>
         </p14:section>
-        <p14:section name="S5 · Thảo luận nhóm và phỏng vấn sâu" id="{afe6fa6f-3585-3014-cafb-9deb461ab72c}">
+        <p14:section name="S5 · Thảo luận nhóm và phỏng vấn sâu" id="{476692a6-f8c5-2456-c738-f7362cdb9d79}">
           <p14:sldIdLst>
             <p14:sldId id="290"/>
             <p14:sldId id="291"/>
@@ -237,7 +237,7 @@
             <p14:sldId id="299"/>
           </p14:sldIdLst>
         </p14:section>
-        <p14:section name="S6 · Nghiên cứu định lượng" id="{e3094bc7-9def-2e51-6bef-be3030c5e36e}">
+        <p14:section name="S6 · Nghiên cứu định lượng" id="{df4277e6-4c4f-f9c7-2f83-fd624a012f2a}">
           <p14:sldIdLst>
             <p14:sldId id="300"/>
             <p14:sldId id="301"/>
@@ -248,7 +248,7 @@
             <p14:sldId id="306"/>
           </p14:sldIdLst>
         </p14:section>
-        <p14:section name="S7 · Hỗn hợp, chọn phương pháp, đạo đức" id="{3d4e291c-7f98-20b7-8346-0a9a675f1aa9}">
+        <p14:section name="S7 · Hỗn hợp, chọn phương pháp, đạo đức" id="{9c090c4b-3106-b0ee-2709-165c8db5282a}">
           <p14:sldIdLst>
             <p14:sldId id="307"/>
             <p14:sldId id="308"/>
@@ -257,13 +257,13 @@
             <p14:sldId id="311"/>
           </p14:sldIdLst>
         </p14:section>
-        <p14:section name="S8 · Thực hành nhóm: Xưởng phương pháp" id="{611e12e0-1253-b220-4e8d-7bb9f98f7b3e}">
+        <p14:section name="S8 · Thực hành nhóm: Xưởng phương pháp" id="{4775b44f-c4f8-d726-caae-dee75b629756}">
           <p14:sldIdLst>
             <p14:sldId id="312"/>
             <p14:sldId id="313"/>
           </p14:sldIdLst>
         </p14:section>
-        <p14:section name="S9 · Kết buổi" id="{b7cd48ad-1daa-3b7e-21f8-5e5a3c60ede1}">
+        <p14:section name="S9 · Kết buổi" id="{345c03f0-74ae-b0f7-266b-089e5d60807b}">
           <p14:sldIdLst>
             <p14:sldId id="314"/>
             <p14:sldId id="315"/>
@@ -1586,7 +1586,8 @@
           <a:p>
             <a:r>
               <a:rPr lang="en-US" dirty="0"/>
-              <a:t>Kiểm tra nhanh 4 phút, theo cặp với bạn ngồi cạnh. Đọc kịch bản: "Một nhóm nghiên cứu ý định mua mỹ phẩm nội địa của sinh viên TP.HCM. Họ tìm được ba con số cho phần bối cảnh. Mỗi mẩu, các bạn có 30 giây bàn với bạn bên cạnh; tôi đếm 3–2–1 thì giơ tay: 1 ngón là dùng được, 2 ngón là dùng có điều kiện, 3 ngón là bỏ. Nhớ: phải nói được tiêu chuẩn nào."
+              <a:t>Thời gian: phút 27–31 của buổi học.
+Kiểm tra nhanh 4 phút, theo cặp với bạn ngồi cạnh. Đọc kịch bản: "Một nhóm nghiên cứu ý định mua mỹ phẩm nội địa của sinh viên TP.HCM. Họ tìm được ba con số cho phần bối cảnh. Mỗi mẩu, các bạn có 30 giây bàn với bạn bên cạnh; tôi đếm 3–2–1 thì giơ tay: 1 ngón là dùng được, 2 ngón là dùng có điều kiện, 3 ngón là bỏ. Nhớ: phải nói được tiêu chuẩn nào."
 Không chấm điểm; bạn nào không muốn giơ tay có thể ghi đáp án ra giấy.</a:t>
             </a:r>
             <a:endParaRPr lang="en-US" dirty="0"/>
@@ -1675,7 +1676,8 @@
           <a:p>
             <a:r>
               <a:rPr lang="en-US" dirty="0"/>
-              <a:t>Phần khởi động 8 phút: chữa nhanh đề cương M4 mà các nhóm đã nộp sau Buổi 6. Mục tiêu không phải chấm điểm lại mà là cho cả lớp thấy hai lỗi phổ biến nhất, vì cả hai đều liên quan trực tiếp đến bài hôm nay.
+              <a:t>Thời gian: phút 0–8 của buổi học.
+Phần khởi động 8 phút: chữa nhanh đề cương M4 mà các nhóm đã nộp sau Buổi 6. Mục tiêu không phải chấm điểm lại mà là cho cả lớp thấy hai lỗi phổ biến nhất, vì cả hai đều liên quan trực tiếp đến bài hôm nay.
 Nói: "Tuần trước các nhóm đã nộp đề cương. Trước khi vào bài mới, tôi chữa nhanh hai lỗi lặp lại ở nhiều nhóm. Các bạn mở bản đề cương của nhóm mình ra và tự kiểm tra trong lúc tôi nói."
 Đảm bảo mỗi nhóm có ít nhất một máy mở đề cương. Nếu nhóm nào không mang, cho phép xem chung với nhóm bên cạnh. Chuyển sang slide hai lỗi.</a:t>
             </a:r>
@@ -1765,7 +1767,8 @@
           <a:p>
             <a:r>
               <a:rPr lang="en-US" dirty="0"/>
-              <a:t>Giới thiệu quy ước trả lời. Đề tài giả định: "Các yếu tố ảnh hưởng đến ý định mua mỹ phẩm nội địa của sinh viên tại TP.HCM." Nhóm tìm được ba mẩu số liệu cho phần bối cảnh, sẽ hiện lần lượt.
+              <a:t>Thời gian: 30 giây bàn với bạn.
+Giới thiệu quy ước trả lời. Đề tài giả định: "Các yếu tố ảnh hưởng đến ý định mua mỹ phẩm nội địa của sinh viên tại TP.HCM." Nhóm tìm được ba mẩu số liệu cho phần bối cảnh, sẽ hiện lần lượt.
 Với mỗi mẩu: đọc to → cho 30 giây thảo luận theo cặp → đếm 3–2–1 → cả lớp giơ tay cùng lúc → gọi một bạn nói mẩu đó đạt hoặc không đạt tiêu chuẩn nào. Yêu cầu trả lời bằng tên tiêu chuẩn: "mẩu này không đạt tiêu chuẩn … vì …".
 Thời gian: khoảng 1 phút mỗi mẩu, cộng 1 phút chốt. Nếu chạy quá giờ, bỏ phần thảo luận chung, chỉ chốt câu về mẩu 2.
 Nhắc lớp nhìn lại bốn tiêu chuẩn: cụ thể, chính xác, thời sự, phù hợp.</a:t>
@@ -2130,7 +2133,8 @@
           <a:p>
             <a:r>
               <a:rPr lang="en-US" dirty="0"/>
-              <a:t>Phần S4 khoảng 17 phút: phân biệt định tính và định lượng, rồi đi sâu vào quan sát — định nghĩa, bốn chiều phân loại, giới hạn đạo đức — và dân tộc học với hai ví dụ minh họa.
+              <a:t>Thời gian: phút 31–48 của buổi học.
+Phần S4 khoảng 17 phút: phân biệt định tính và định lượng, rồi đi sâu vào quan sát — định nghĩa, bốn chiều phân loại, giới hạn đạo đức — và dân tộc học với hai ví dụ minh họa.
 Nói: "Khi dữ liệu thứ cấp không đủ, nhóm phải tự thu. Hôm nay đi lần lượt từng phương pháp, bắt đầu từ phương pháp không cần hỏi ai câu nào: quan sát." Phần đạo đức của quan sát cần đi chậm, không cắt khi trễ giờ.</a:t>
             </a:r>
             <a:endParaRPr lang="en-US" dirty="0"/>
@@ -3134,7 +3138,8 @@
           <a:p>
             <a:r>
               <a:rPr lang="en-US" dirty="0"/>
-              <a:t>Giải lao 15 phút, từ phút 48 đến phút 63. Điền giờ quay lại cụ thể vào chỗ "…" trước buổi học, hoặc viết lên bảng.
+              <a:t>Thời gian: giải lao 15 phút.
+Giải lao 15 phút, từ phút 48 đến phút 63. Điền giờ quay lại cụ thể vào chỗ "…" trước buổi học, hoặc viết lên bảng.
 Nói: "Nghỉ 15 phút. Trong giờ nghỉ, thử nghĩ: chuyện mua mỹ phẩm, bạn sẽ kể thật hơn khi ngồi với 8 người lạ hay với 1 người? Sau giải lao chúng ta bắt đầu bằng câu hỏi này."
 Trong giờ nghỉ, giảng viên có thể đi một vòng xem các nhóm đã mở đề cương M4 và đã nghĩ đến nguồn thứ cấp nào chưa — chuẩn bị cho phần thực hành. Chuẩn bị sẵn slide tiếp theo trên màn hình khi lớp quay lại.</a:t>
             </a:r>
@@ -3224,7 +3229,8 @@
           <a:p>
             <a:r>
               <a:rPr lang="en-US" dirty="0"/>
-              <a:t>Phần S5 khoảng 17 phút: thảo luận nhóm tập trung (định nghĩa, vai trò người điều phối, hiệu ứng tuân thủ đám đông), phỏng vấn sâu (điểm mạnh, điểm yếu, ba kỹ năng), một hoạt động nhỏ 3 phút sửa ba câu hỏi lỗi, và khi nào chọn phương pháp nào.
+              <a:t>Thời gian: phút 63–80 của buổi học.
+Phần S5 khoảng 17 phút: thảo luận nhóm tập trung (định nghĩa, vai trò người điều phối, hiệu ứng tuân thủ đám đông), phỏng vấn sâu (điểm mạnh, điểm yếu, ba kỹ năng), một hoạt động nhỏ 3 phút sửa ba câu hỏi lỗi, và khi nào chọn phương pháp nào.
 Slide UEF dừng ở phần quan sát — toàn bộ phần này dùng slide bổ sung. Mở phần bằng câu hỏi đã gợi trong giờ giải lao.
 Nhắc lớp: phần này nối trực tiếp với thực hành cuối buổi — mỗi bạn sẽ đóng vai phỏng vấn sâu 5 phút, nên chú ý ba kỹ năng và ba loại câu hỏi cần tránh.</a:t>
             </a:r>
@@ -3953,7 +3959,8 @@
           <a:p>
             <a:r>
               <a:rPr lang="en-US" dirty="0"/>
-              <a:t>Hoạt động nhỏ 3 phút. Ba câu hỏi lỗi đều là giả định. Yêu cầu: theo cặp, sửa cả ba câu trong 1 phút. Sau đó gọi 2–3 bạn đọc câu đã sửa, rồi hiện đáp án gợi ý ở slide sau.
+              <a:t>Thời gian: 1 phút.
+Hoạt động nhỏ 3 phút. Ba câu hỏi lỗi đều là giả định. Yêu cầu: theo cặp, sửa cả ba câu trong 1 phút. Sau đó gọi 2–3 bạn đọc câu đã sửa, rồi hiện đáp án gợi ý ở slide sau.
 Trong lúc lớp làm, đi quanh lớp nghe. Gợi ý nếu cặp nào bí: câu 1 lỗi gì — nó đã gợi sẵn rằng bao bì xanh là quan trọng; câu 2 có mấy ý; câu 3 hỏi về lúc nào — tương lai hay quá khứ?
 Khi gọi bạn đọc câu sửa, hỏi lớp: "Câu sửa này còn dẫn dắt không? Còn hai ý không?" Để lớp tự đánh giá trước khi hiện đáp án.
 Nếu lớp nhanh và còn thời gian, có thể mở rộng thành 6 câu theo phương án kéo dài của lesson plan.</a:t>
@@ -4226,7 +4233,8 @@
           <a:p>
             <a:r>
               <a:rPr lang="en-US" dirty="0"/>
-              <a:t>Phần S6 khoảng 12 phút: khảo sát với bốn hình thức và cách khắc phục nhược điểm của khảo sát online; nhóm cố định; thử nghiệm với nhóm thử nghiệm, nhóm đối chứng, phân nhóm ngẫu nhiên và tình huống "biến thứ ba".
+              <a:t>Thời gian: phút 80–92 của buổi học.
+Phần S6 khoảng 12 phút: khảo sát với bốn hình thức và cách khắc phục nhược điểm của khảo sát online; nhóm cố định; thử nghiệm với nhóm thử nghiệm, nhóm đối chứng, phân nhóm ngẫu nhiên và tình huống "biến thứ ba".
 Nói: "Định tính trả lời 'vì sao'. Giờ sang các phương pháp trả lời 'bao nhiêu' và 'có gây ra không'." Nếu trễ giờ, phần nhóm cố định chỉ nêu định nghĩa một câu.
 Nhắc lớp: phần lớn các nhóm định lượng sẽ làm khảo sát trực tuyến, nên slide về bốn việc cần ghi rõ trong phần phương pháp là phần các nhóm dùng ngay.</a:t>
             </a:r>
@@ -4682,7 +4690,8 @@
           <a:p>
             <a:r>
               <a:rPr lang="en-US" dirty="0"/>
-              <a:t>Phần S2 kéo dài khoảng 19 phút: khái niệm dữ liệu thứ cấp và sơ cấp, giá trị và hạn chế, vai trò, phân loại bên trong và bên ngoài, nguồn dùng được cho dự án sinh viên, và quan trọng nhất là bốn tiêu chuẩn đánh giá dữ liệu thứ cấp.
+              <a:t>Thời gian: phút 8–27 của buổi học.
+Phần S2 kéo dài khoảng 19 phút: khái niệm dữ liệu thứ cấp và sơ cấp, giá trị và hạn chế, vai trò, phân loại bên trong và bên ngoài, nguồn dùng được cho dự án sinh viên, và quan trọng nhất là bốn tiêu chuẩn đánh giá dữ liệu thứ cấp.
 Nói: "Phần này các nhóm sẽ dùng ngay trong thực hành cuối buổi, nên chú ý nhất ở bốn tiêu chuẩn." Nếu trễ giờ, có thể gộp thời sự và phù hợp, và bỏ slide nguồn Việt Nam vì nội dung đã có trong tài liệu đọc thêm.</a:t>
             </a:r>
             <a:endParaRPr lang="en-US" dirty="0"/>
@@ -4954,7 +4963,8 @@
           <a:p>
             <a:r>
               <a:rPr lang="en-US" dirty="0"/>
-              <a:t>Phần S7 khoảng 8 phút: phương pháp hỗn hợp (2 phút), chọn phương pháp theo câu hỏi kèm kiểm tra nhanh giơ tay (3 phút), và năm nguyên tắc đạo đức khi thu dữ liệu sơ cấp (3 phút).
+              <a:t>Thời gian: phút 92–100 của buổi học.
+Phần S7 khoảng 8 phút: phương pháp hỗn hợp (2 phút), chọn phương pháp theo câu hỏi kèm kiểm tra nhanh giơ tay (3 phút), và năm nguyên tắc đạo đức khi thu dữ liệu sơ cấp (3 phút).
 Đây là phần nối kiến thức với dự án: sau phần này các nhóm phải tự chọn và biện luận phương pháp trong thực hành. Phần đạo đức không cắt khi trễ giờ.
 Chuẩn bị sẵn quy ước giơ tay 1–5 ngón cho phần kiểm tra nhanh; quy ước này trùng với thứ tự các dòng trong bảng chọn phương pháp.</a:t>
             </a:r>
@@ -5408,7 +5418,8 @@
           <a:p>
             <a:r>
               <a:rPr lang="en-US" dirty="0"/>
-              <a:t>Chuyển ý: "Đủ lý thuyết. 45 phút tới, mỗi nhóm viết lại mục 4.3.2 — lần này cho thật đầy đủ."
+              <a:t>Thời gian: phút 100–145 của buổi học.
+Chuyển ý: "Đủ lý thuyết. 45 phút tới, mỗi nhóm viết lại mục 4.3.2 — lần này cho thật đầy đủ."
 Phát phiếu nhóm Xưởng phương pháp (bảng A dữ liệu thứ cấp, bảng B nhóm định lượng, bảng C nhóm định tính, bảng kiểm D cho người quan sát khi đóng vai). Nhóm cần máy tính và đề cương M4. Không cắt phần thực hành khi trễ giờ; nếu thiếu giờ, chặng đóng vai chuyển thành bài tập phỏng vấn thử một người ngoài lớp trước Buổi 8.</a:t>
             </a:r>
             <a:endParaRPr lang="en-US" dirty="0"/>
@@ -5497,7 +5508,9 @@
           <a:p>
             <a:r>
               <a:rPr lang="en-US" dirty="0"/>
-              <a:t>Để slide này trên màn hình suốt 45 phút. Chặng 1 (12'): tìm 2–3 nguồn có số liệu cho phần bối cảnh theo thứ tự gợi ý — bài báo khoa học đã có, số liệu cơ quan nhà nước và hiệp hội, báo cáo miễn phí của công ty nghiên cứu; ghi con số định dùng và đánh giá theo bốn tiêu chuẩn ở bảng A. Con số tìm qua bài báo mạng phải truy về nguồn gốc.
+              <a:t>Thời gian: 45 phút.
+Phân bổ thời gian — chặng 1: 12 phút; chặng 2: 18 phút; chặng 3: 7 phút; (chặng 3 gốc: “Đóng vai phỏng vấn sâu 5' theo cặp + rút kinh nghiệm”); chặng 4: 8 phút; (chặng 4 gốc: “3 nhóm chia sẻ, mỗi nhóm 1,5 phút”).
+Để slide này trên màn hình suốt 45 phút. Chặng 1 (12'): tìm 2–3 nguồn có số liệu cho phần bối cảnh theo thứ tự gợi ý — bài báo khoa học đã có, số liệu cơ quan nhà nước và hiệp hội, báo cáo miễn phí của công ty nghiên cứu; ghi con số định dùng và đánh giá theo bốn tiêu chuẩn ở bảng A. Con số tìm qua bài báo mạng phải truy về nguồn gốc.
 Chặng 2 (18'): viết lại câu hỏi nghiên cứu chính, chọn phương pháp xuất phát từ câu hỏi, viết mô tả theo bảng B (định lượng: kênh phát hành, câu gạn lọc, câu kiểm tra chú ý, phỏng vấn sơ bộ) hoặc bảng C (định tính: số người, tiêu chí chọn, 5–6 câu hỏi chính), cộng 2–3 câu cam kết đạo đức.
 Chặng 3 (7'): ghép cặp phỏng vấn 5 phút, mở đầu bằng giới thiệu mục đích và xin phép ghi âm, dùng ít nhất 2 câu hỏi gợi mở; người thứ ba cầm bảng kiểm D; 2 phút rút kinh nghiệm. Người được phỏng vấn có thể nhập vai khách hàng giả định.
 Chặng 4 (8'): 3 nhóm trình bày câu hỏi nghiên cứu, phương pháp và lý do, một phát hiện khi đóng vai.
@@ -5589,7 +5602,8 @@
           <a:p>
             <a:r>
               <a:rPr lang="en-US" dirty="0"/>
-              <a:t>Năm phút cuối: phiếu ra về, giao bài tập về nhà theo lộ trình dự án và nối sang Buổi 8. Phát phiếu giấy nhỏ cho từng bạn ngay khi chặng chia sẻ kết thúc để tiết kiệm thời gian.
+              <a:t>Thời gian: phút 145–150 của buổi học.
+Năm phút cuối: phiếu ra về, giao bài tập về nhà theo lộ trình dự án và nối sang Buổi 8. Phát phiếu giấy nhỏ cho từng bạn ngay khi chặng chia sẻ kết thúc để tiết kiệm thời gian.
 Không cắt phần này khi trễ giờ: phiếu ra về là cách giảng viên kiểm tra mục tiêu cốt lõi của buổi — nhóm có chọn phương pháp xuất phát từ câu hỏi nghiên cứu hay không.
 Nếu còn thời gian, nhắc lại một câu: dữ liệu thứ cấp trước, sơ cấp sau, và câu hỏi quyết định phương pháp.</a:t>
             </a:r>
@@ -6453,8 +6467,8 @@
         </p:nvSpPr>
         <p:spPr>
           <a:xfrm>
-            <a:off x="3840480" y="2103120"/>
-            <a:ext cx="6766560" cy="2194560"/>
+            <a:off x="3840480" y="2240280"/>
+            <a:ext cx="6766560" cy="2377440"/>
           </a:xfrm>
           <a:prstGeom prst="rect">
             <a:avLst/>
@@ -14462,49 +14476,7 @@
       </p:sp>
       <p:sp>
         <p:nvSpPr>
-          <p:cNvPr id="8" name="Text 6"/>
-          <p:cNvSpPr txBox="1"/>
-          <p:nvPr/>
-        </p:nvSpPr>
-        <p:spPr>
-          <a:xfrm>
-            <a:off x="3840480" y="1417320"/>
-            <a:ext cx="6766560" cy="594360"/>
-          </a:xfrm>
-          <a:prstGeom prst="rect">
-            <a:avLst/>
-          </a:prstGeom>
-          <a:noFill/>
-          <a:ln/>
-        </p:spPr>
-        <p:txBody>
-          <a:bodyPr wrap="square" lIns="76200" tIns="76200" rIns="76200" bIns="76200" rtlCol="0" anchor="t"/>
-          <a:lstStyle/>
-          <a:p>
-            <a:pPr algn="l" indent="0" marL="0">
-              <a:lnSpc>
-                <a:spcPts val="3600"/>
-              </a:lnSpc>
-              <a:buNone/>
-            </a:pPr>
-            <a:r>
-              <a:rPr lang="en-US" sz="2800" b="1" dirty="0">
-                <a:solidFill>
-                  <a:srgbClr val="962B7C"/>
-                </a:solidFill>
-                <a:latin typeface="Alexandria" pitchFamily="34" charset="0"/>
-                <a:ea typeface="Alexandria" pitchFamily="34" charset="-122"/>
-                <a:cs typeface="Alexandria" pitchFamily="34" charset="-120"/>
-              </a:rPr>
-              <a:t>27–31 phút</a:t>
-            </a:r>
-            <a:endParaRPr lang="en-US" sz="2800" dirty="0"/>
-          </a:p>
-        </p:txBody>
-      </p:sp>
-      <p:sp>
-        <p:nvSpPr>
-          <p:cNvPr id="9" name="Text 0"/>
+          <p:cNvPr id="8" name="Text 0"/>
           <p:cNvSpPr/>
           <p:nvPr>
             <p:ph idx="100" type="title" hasCustomPrompt="1"/>
@@ -14512,17 +14484,17 @@
         </p:nvSpPr>
         <p:spPr>
           <a:xfrm>
-            <a:off x="3840480" y="2103120"/>
-            <a:ext cx="6766560" cy="2194560"/>
-          </a:xfrm>
-          <a:prstGeom prst="rect">
-            <a:avLst/>
-          </a:prstGeom>
-          <a:noFill/>
-          <a:ln/>
-        </p:spPr>
-        <p:txBody>
-          <a:bodyPr wrap="square" lIns="76200" tIns="76200" rIns="76200" bIns="76200" rtlCol="0" anchor="t"/>
+            <a:off x="3840480" y="2240280"/>
+            <a:ext cx="6766560" cy="2377440"/>
+          </a:xfrm>
+          <a:prstGeom prst="rect">
+            <a:avLst/>
+          </a:prstGeom>
+          <a:noFill/>
+          <a:ln/>
+        </p:spPr>
+        <p:txBody>
+          <a:bodyPr wrap="square" lIns="76200" tIns="76200" rIns="76200" bIns="76200" rtlCol="0" anchor="ctr"/>
           <a:lstStyle/>
           <a:p>
             <a:pPr algn="l" indent="0" marL="0">
@@ -14757,49 +14729,7 @@
       </p:sp>
       <p:sp>
         <p:nvSpPr>
-          <p:cNvPr id="8" name="Text 6"/>
-          <p:cNvSpPr txBox="1"/>
-          <p:nvPr/>
-        </p:nvSpPr>
-        <p:spPr>
-          <a:xfrm>
-            <a:off x="3840480" y="1417320"/>
-            <a:ext cx="6766560" cy="594360"/>
-          </a:xfrm>
-          <a:prstGeom prst="rect">
-            <a:avLst/>
-          </a:prstGeom>
-          <a:noFill/>
-          <a:ln/>
-        </p:spPr>
-        <p:txBody>
-          <a:bodyPr wrap="square" lIns="76200" tIns="76200" rIns="76200" bIns="76200" rtlCol="0" anchor="t"/>
-          <a:lstStyle/>
-          <a:p>
-            <a:pPr algn="l" indent="0" marL="0">
-              <a:lnSpc>
-                <a:spcPts val="3600"/>
-              </a:lnSpc>
-              <a:buNone/>
-            </a:pPr>
-            <a:r>
-              <a:rPr lang="en-US" sz="2800" b="1" dirty="0">
-                <a:solidFill>
-                  <a:srgbClr val="962B7C"/>
-                </a:solidFill>
-                <a:latin typeface="Alexandria" pitchFamily="34" charset="0"/>
-                <a:ea typeface="Alexandria" pitchFamily="34" charset="-122"/>
-                <a:cs typeface="Alexandria" pitchFamily="34" charset="-120"/>
-              </a:rPr>
-              <a:t>0–8 phút</a:t>
-            </a:r>
-            <a:endParaRPr lang="en-US" sz="2800" dirty="0"/>
-          </a:p>
-        </p:txBody>
-      </p:sp>
-      <p:sp>
-        <p:nvSpPr>
-          <p:cNvPr id="9" name="Text 0"/>
+          <p:cNvPr id="8" name="Text 0"/>
           <p:cNvSpPr/>
           <p:nvPr>
             <p:ph idx="100" type="title" hasCustomPrompt="1"/>
@@ -14807,17 +14737,17 @@
         </p:nvSpPr>
         <p:spPr>
           <a:xfrm>
-            <a:off x="3840480" y="2103120"/>
-            <a:ext cx="6766560" cy="2194560"/>
-          </a:xfrm>
-          <a:prstGeom prst="rect">
-            <a:avLst/>
-          </a:prstGeom>
-          <a:noFill/>
-          <a:ln/>
-        </p:spPr>
-        <p:txBody>
-          <a:bodyPr wrap="square" lIns="76200" tIns="76200" rIns="76200" bIns="76200" rtlCol="0" anchor="t"/>
+            <a:off x="3840480" y="2240280"/>
+            <a:ext cx="6766560" cy="2377440"/>
+          </a:xfrm>
+          <a:prstGeom prst="rect">
+            <a:avLst/>
+          </a:prstGeom>
+          <a:noFill/>
+          <a:ln/>
+        </p:spPr>
+        <p:txBody>
+          <a:bodyPr wrap="square" lIns="76200" tIns="76200" rIns="76200" bIns="76200" rtlCol="0" anchor="ctr"/>
           <a:lstStyle/>
           <a:p>
             <a:pPr algn="l" indent="0" marL="0">
@@ -15129,7 +15059,7 @@
                 <a:ea typeface="Alexandria" pitchFamily="34" charset="-122"/>
                 <a:cs typeface="Alexandria" pitchFamily="34" charset="-120"/>
               </a:rPr>
-              <a:t>Bàn 30 giây → đếm 3–2–1 → nêu tên tiêu chuẩn</a:t>
+              <a:t>Bàn với bạn → đếm 3–2–1 → nêu tên tiêu chuẩn</a:t>
             </a:r>
             <a:endParaRPr lang="en-US" sz="2600" dirty="0"/>
           </a:p>
@@ -17122,49 +17052,7 @@
       </p:sp>
       <p:sp>
         <p:nvSpPr>
-          <p:cNvPr id="8" name="Text 6"/>
-          <p:cNvSpPr txBox="1"/>
-          <p:nvPr/>
-        </p:nvSpPr>
-        <p:spPr>
-          <a:xfrm>
-            <a:off x="3840480" y="1417320"/>
-            <a:ext cx="6766560" cy="594360"/>
-          </a:xfrm>
-          <a:prstGeom prst="rect">
-            <a:avLst/>
-          </a:prstGeom>
-          <a:noFill/>
-          <a:ln/>
-        </p:spPr>
-        <p:txBody>
-          <a:bodyPr wrap="square" lIns="76200" tIns="76200" rIns="76200" bIns="76200" rtlCol="0" anchor="t"/>
-          <a:lstStyle/>
-          <a:p>
-            <a:pPr algn="l" indent="0" marL="0">
-              <a:lnSpc>
-                <a:spcPts val="3600"/>
-              </a:lnSpc>
-              <a:buNone/>
-            </a:pPr>
-            <a:r>
-              <a:rPr lang="en-US" sz="2800" b="1" dirty="0">
-                <a:solidFill>
-                  <a:srgbClr val="962B7C"/>
-                </a:solidFill>
-                <a:latin typeface="Alexandria" pitchFamily="34" charset="0"/>
-                <a:ea typeface="Alexandria" pitchFamily="34" charset="-122"/>
-                <a:cs typeface="Alexandria" pitchFamily="34" charset="-120"/>
-              </a:rPr>
-              <a:t>31–48 phút</a:t>
-            </a:r>
-            <a:endParaRPr lang="en-US" sz="2800" dirty="0"/>
-          </a:p>
-        </p:txBody>
-      </p:sp>
-      <p:sp>
-        <p:nvSpPr>
-          <p:cNvPr id="9" name="Text 0"/>
+          <p:cNvPr id="8" name="Text 0"/>
           <p:cNvSpPr/>
           <p:nvPr>
             <p:ph idx="100" type="title" hasCustomPrompt="1"/>
@@ -17172,17 +17060,17 @@
         </p:nvSpPr>
         <p:spPr>
           <a:xfrm>
-            <a:off x="3840480" y="2103120"/>
-            <a:ext cx="6766560" cy="2194560"/>
-          </a:xfrm>
-          <a:prstGeom prst="rect">
-            <a:avLst/>
-          </a:prstGeom>
-          <a:noFill/>
-          <a:ln/>
-        </p:spPr>
-        <p:txBody>
-          <a:bodyPr wrap="square" lIns="76200" tIns="76200" rIns="76200" bIns="76200" rtlCol="0" anchor="t"/>
+            <a:off x="3840480" y="2240280"/>
+            <a:ext cx="6766560" cy="2377440"/>
+          </a:xfrm>
+          <a:prstGeom prst="rect">
+            <a:avLst/>
+          </a:prstGeom>
+          <a:noFill/>
+          <a:ln/>
+        </p:spPr>
+        <p:txBody>
+          <a:bodyPr wrap="square" lIns="76200" tIns="76200" rIns="76200" bIns="76200" rtlCol="0" anchor="ctr"/>
           <a:lstStyle/>
           <a:p>
             <a:pPr algn="l" indent="0" marL="0">
@@ -25420,7 +25308,7 @@
                 <a:ea typeface="Alexandria" pitchFamily="34" charset="-122"/>
                 <a:cs typeface="Alexandria" pitchFamily="34" charset="-120"/>
               </a:rPr>
-              <a:t>15'</a:t>
+              <a:t>Nghỉ</a:t>
             </a:r>
             <a:endParaRPr lang="en-US" sz="9600" dirty="0"/>
           </a:p>
@@ -25462,7 +25350,7 @@
                 <a:ea typeface="Alexandria" pitchFamily="34" charset="-122"/>
                 <a:cs typeface="Alexandria" pitchFamily="34" charset="-120"/>
               </a:rPr>
-              <a:t>Giải lao 15 phút</a:t>
+              <a:t>Giải lao</a:t>
             </a:r>
             <a:endParaRPr lang="en-US" sz="4800" dirty="0"/>
           </a:p>
@@ -25724,49 +25612,7 @@
       </p:sp>
       <p:sp>
         <p:nvSpPr>
-          <p:cNvPr id="8" name="Text 6"/>
-          <p:cNvSpPr txBox="1"/>
-          <p:nvPr/>
-        </p:nvSpPr>
-        <p:spPr>
-          <a:xfrm>
-            <a:off x="3840480" y="1417320"/>
-            <a:ext cx="6766560" cy="594360"/>
-          </a:xfrm>
-          <a:prstGeom prst="rect">
-            <a:avLst/>
-          </a:prstGeom>
-          <a:noFill/>
-          <a:ln/>
-        </p:spPr>
-        <p:txBody>
-          <a:bodyPr wrap="square" lIns="76200" tIns="76200" rIns="76200" bIns="76200" rtlCol="0" anchor="t"/>
-          <a:lstStyle/>
-          <a:p>
-            <a:pPr algn="l" indent="0" marL="0">
-              <a:lnSpc>
-                <a:spcPts val="3600"/>
-              </a:lnSpc>
-              <a:buNone/>
-            </a:pPr>
-            <a:r>
-              <a:rPr lang="en-US" sz="2800" b="1" dirty="0">
-                <a:solidFill>
-                  <a:srgbClr val="962B7C"/>
-                </a:solidFill>
-                <a:latin typeface="Alexandria" pitchFamily="34" charset="0"/>
-                <a:ea typeface="Alexandria" pitchFamily="34" charset="-122"/>
-                <a:cs typeface="Alexandria" pitchFamily="34" charset="-120"/>
-              </a:rPr>
-              <a:t>63–80 phút</a:t>
-            </a:r>
-            <a:endParaRPr lang="en-US" sz="2800" dirty="0"/>
-          </a:p>
-        </p:txBody>
-      </p:sp>
-      <p:sp>
-        <p:nvSpPr>
-          <p:cNvPr id="9" name="Text 0"/>
+          <p:cNvPr id="8" name="Text 0"/>
           <p:cNvSpPr/>
           <p:nvPr>
             <p:ph idx="100" type="title" hasCustomPrompt="1"/>
@@ -25774,17 +25620,17 @@
         </p:nvSpPr>
         <p:spPr>
           <a:xfrm>
-            <a:off x="3840480" y="2103120"/>
-            <a:ext cx="6766560" cy="2194560"/>
-          </a:xfrm>
-          <a:prstGeom prst="rect">
-            <a:avLst/>
-          </a:prstGeom>
-          <a:noFill/>
-          <a:ln/>
-        </p:spPr>
-        <p:txBody>
-          <a:bodyPr wrap="square" lIns="76200" tIns="76200" rIns="76200" bIns="76200" rtlCol="0" anchor="t"/>
+            <a:off x="3840480" y="2240280"/>
+            <a:ext cx="6766560" cy="2377440"/>
+          </a:xfrm>
+          <a:prstGeom prst="rect">
+            <a:avLst/>
+          </a:prstGeom>
+          <a:noFill/>
+          <a:ln/>
+        </p:spPr>
+        <p:txBody>
+          <a:bodyPr wrap="square" lIns="76200" tIns="76200" rIns="76200" bIns="76200" rtlCol="0" anchor="ctr"/>
           <a:lstStyle/>
           <a:p>
             <a:pPr algn="l" indent="0" marL="0">
@@ -31955,7 +31801,7 @@
                 <a:ea typeface="Alexandria" pitchFamily="34" charset="-122"/>
                 <a:cs typeface="Alexandria" pitchFamily="34" charset="-120"/>
               </a:rPr>
-              <a:t>Cặp đôi: 1 phút sửa cả ba câu</a:t>
+              <a:t>Cặp đôi: sửa cả ba câu</a:t>
             </a:r>
             <a:endParaRPr lang="en-US" sz="2600" dirty="0"/>
           </a:p>
@@ -33886,49 +33732,7 @@
       </p:sp>
       <p:sp>
         <p:nvSpPr>
-          <p:cNvPr id="8" name="Text 6"/>
-          <p:cNvSpPr txBox="1"/>
-          <p:nvPr/>
-        </p:nvSpPr>
-        <p:spPr>
-          <a:xfrm>
-            <a:off x="3840480" y="1417320"/>
-            <a:ext cx="6766560" cy="594360"/>
-          </a:xfrm>
-          <a:prstGeom prst="rect">
-            <a:avLst/>
-          </a:prstGeom>
-          <a:noFill/>
-          <a:ln/>
-        </p:spPr>
-        <p:txBody>
-          <a:bodyPr wrap="square" lIns="76200" tIns="76200" rIns="76200" bIns="76200" rtlCol="0" anchor="t"/>
-          <a:lstStyle/>
-          <a:p>
-            <a:pPr algn="l" indent="0" marL="0">
-              <a:lnSpc>
-                <a:spcPts val="3600"/>
-              </a:lnSpc>
-              <a:buNone/>
-            </a:pPr>
-            <a:r>
-              <a:rPr lang="en-US" sz="2800" b="1" dirty="0">
-                <a:solidFill>
-                  <a:srgbClr val="962B7C"/>
-                </a:solidFill>
-                <a:latin typeface="Alexandria" pitchFamily="34" charset="0"/>
-                <a:ea typeface="Alexandria" pitchFamily="34" charset="-122"/>
-                <a:cs typeface="Alexandria" pitchFamily="34" charset="-120"/>
-              </a:rPr>
-              <a:t>80–92 phút</a:t>
-            </a:r>
-            <a:endParaRPr lang="en-US" sz="2800" dirty="0"/>
-          </a:p>
-        </p:txBody>
-      </p:sp>
-      <p:sp>
-        <p:nvSpPr>
-          <p:cNvPr id="9" name="Text 0"/>
+          <p:cNvPr id="8" name="Text 0"/>
           <p:cNvSpPr/>
           <p:nvPr>
             <p:ph idx="100" type="title" hasCustomPrompt="1"/>
@@ -33936,17 +33740,17 @@
         </p:nvSpPr>
         <p:spPr>
           <a:xfrm>
-            <a:off x="3840480" y="2103120"/>
-            <a:ext cx="6766560" cy="2194560"/>
-          </a:xfrm>
-          <a:prstGeom prst="rect">
-            <a:avLst/>
-          </a:prstGeom>
-          <a:noFill/>
-          <a:ln/>
-        </p:spPr>
-        <p:txBody>
-          <a:bodyPr wrap="square" lIns="76200" tIns="76200" rIns="76200" bIns="76200" rtlCol="0" anchor="t"/>
+            <a:off x="3840480" y="2240280"/>
+            <a:ext cx="6766560" cy="2377440"/>
+          </a:xfrm>
+          <a:prstGeom prst="rect">
+            <a:avLst/>
+          </a:prstGeom>
+          <a:noFill/>
+          <a:ln/>
+        </p:spPr>
+        <p:txBody>
+          <a:bodyPr wrap="square" lIns="76200" tIns="76200" rIns="76200" bIns="76200" rtlCol="0" anchor="ctr"/>
           <a:lstStyle/>
           <a:p>
             <a:pPr algn="l" indent="0" marL="0">
@@ -37790,49 +37594,7 @@
       </p:sp>
       <p:sp>
         <p:nvSpPr>
-          <p:cNvPr id="8" name="Text 6"/>
-          <p:cNvSpPr txBox="1"/>
-          <p:nvPr/>
-        </p:nvSpPr>
-        <p:spPr>
-          <a:xfrm>
-            <a:off x="3840480" y="1417320"/>
-            <a:ext cx="6766560" cy="594360"/>
-          </a:xfrm>
-          <a:prstGeom prst="rect">
-            <a:avLst/>
-          </a:prstGeom>
-          <a:noFill/>
-          <a:ln/>
-        </p:spPr>
-        <p:txBody>
-          <a:bodyPr wrap="square" lIns="76200" tIns="76200" rIns="76200" bIns="76200" rtlCol="0" anchor="t"/>
-          <a:lstStyle/>
-          <a:p>
-            <a:pPr algn="l" indent="0" marL="0">
-              <a:lnSpc>
-                <a:spcPts val="3600"/>
-              </a:lnSpc>
-              <a:buNone/>
-            </a:pPr>
-            <a:r>
-              <a:rPr lang="en-US" sz="2800" b="1" dirty="0">
-                <a:solidFill>
-                  <a:srgbClr val="962B7C"/>
-                </a:solidFill>
-                <a:latin typeface="Alexandria" pitchFamily="34" charset="0"/>
-                <a:ea typeface="Alexandria" pitchFamily="34" charset="-122"/>
-                <a:cs typeface="Alexandria" pitchFamily="34" charset="-120"/>
-              </a:rPr>
-              <a:t>8–27 phút</a:t>
-            </a:r>
-            <a:endParaRPr lang="en-US" sz="2800" dirty="0"/>
-          </a:p>
-        </p:txBody>
-      </p:sp>
-      <p:sp>
-        <p:nvSpPr>
-          <p:cNvPr id="9" name="Text 0"/>
+          <p:cNvPr id="8" name="Text 0"/>
           <p:cNvSpPr/>
           <p:nvPr>
             <p:ph idx="100" type="title" hasCustomPrompt="1"/>
@@ -37840,17 +37602,17 @@
         </p:nvSpPr>
         <p:spPr>
           <a:xfrm>
-            <a:off x="3840480" y="2103120"/>
-            <a:ext cx="6766560" cy="2194560"/>
-          </a:xfrm>
-          <a:prstGeom prst="rect">
-            <a:avLst/>
-          </a:prstGeom>
-          <a:noFill/>
-          <a:ln/>
-        </p:spPr>
-        <p:txBody>
-          <a:bodyPr wrap="square" lIns="76200" tIns="76200" rIns="76200" bIns="76200" rtlCol="0" anchor="t"/>
+            <a:off x="3840480" y="2240280"/>
+            <a:ext cx="6766560" cy="2377440"/>
+          </a:xfrm>
+          <a:prstGeom prst="rect">
+            <a:avLst/>
+          </a:prstGeom>
+          <a:noFill/>
+          <a:ln/>
+        </p:spPr>
+        <p:txBody>
+          <a:bodyPr wrap="square" lIns="76200" tIns="76200" rIns="76200" bIns="76200" rtlCol="0" anchor="ctr"/>
           <a:lstStyle/>
           <a:p>
             <a:pPr algn="l" indent="0" marL="0">
@@ -39351,49 +39113,7 @@
       </p:sp>
       <p:sp>
         <p:nvSpPr>
-          <p:cNvPr id="8" name="Text 6"/>
-          <p:cNvSpPr txBox="1"/>
-          <p:nvPr/>
-        </p:nvSpPr>
-        <p:spPr>
-          <a:xfrm>
-            <a:off x="3840480" y="1417320"/>
-            <a:ext cx="6766560" cy="594360"/>
-          </a:xfrm>
-          <a:prstGeom prst="rect">
-            <a:avLst/>
-          </a:prstGeom>
-          <a:noFill/>
-          <a:ln/>
-        </p:spPr>
-        <p:txBody>
-          <a:bodyPr wrap="square" lIns="76200" tIns="76200" rIns="76200" bIns="76200" rtlCol="0" anchor="t"/>
-          <a:lstStyle/>
-          <a:p>
-            <a:pPr algn="l" indent="0" marL="0">
-              <a:lnSpc>
-                <a:spcPts val="3600"/>
-              </a:lnSpc>
-              <a:buNone/>
-            </a:pPr>
-            <a:r>
-              <a:rPr lang="en-US" sz="2800" b="1" dirty="0">
-                <a:solidFill>
-                  <a:srgbClr val="962B7C"/>
-                </a:solidFill>
-                <a:latin typeface="Alexandria" pitchFamily="34" charset="0"/>
-                <a:ea typeface="Alexandria" pitchFamily="34" charset="-122"/>
-                <a:cs typeface="Alexandria" pitchFamily="34" charset="-120"/>
-              </a:rPr>
-              <a:t>92–100 phút</a:t>
-            </a:r>
-            <a:endParaRPr lang="en-US" sz="2800" dirty="0"/>
-          </a:p>
-        </p:txBody>
-      </p:sp>
-      <p:sp>
-        <p:nvSpPr>
-          <p:cNvPr id="9" name="Text 0"/>
+          <p:cNvPr id="8" name="Text 0"/>
           <p:cNvSpPr/>
           <p:nvPr>
             <p:ph idx="100" type="title" hasCustomPrompt="1"/>
@@ -39401,17 +39121,17 @@
         </p:nvSpPr>
         <p:spPr>
           <a:xfrm>
-            <a:off x="3840480" y="2103120"/>
-            <a:ext cx="6766560" cy="2194560"/>
-          </a:xfrm>
-          <a:prstGeom prst="rect">
-            <a:avLst/>
-          </a:prstGeom>
-          <a:noFill/>
-          <a:ln/>
-        </p:spPr>
-        <p:txBody>
-          <a:bodyPr wrap="square" lIns="76200" tIns="76200" rIns="76200" bIns="76200" rtlCol="0" anchor="t"/>
+            <a:off x="3840480" y="2240280"/>
+            <a:ext cx="6766560" cy="2377440"/>
+          </a:xfrm>
+          <a:prstGeom prst="rect">
+            <a:avLst/>
+          </a:prstGeom>
+          <a:noFill/>
+          <a:ln/>
+        </p:spPr>
+        <p:txBody>
+          <a:bodyPr wrap="square" lIns="76200" tIns="76200" rIns="76200" bIns="76200" rtlCol="0" anchor="ctr"/>
           <a:lstStyle/>
           <a:p>
             <a:pPr algn="l" indent="0" marL="0">
@@ -43389,49 +43109,7 @@
       </p:sp>
       <p:sp>
         <p:nvSpPr>
-          <p:cNvPr id="8" name="Text 6"/>
-          <p:cNvSpPr txBox="1"/>
-          <p:nvPr/>
-        </p:nvSpPr>
-        <p:spPr>
-          <a:xfrm>
-            <a:off x="3840480" y="1417320"/>
-            <a:ext cx="6766560" cy="594360"/>
-          </a:xfrm>
-          <a:prstGeom prst="rect">
-            <a:avLst/>
-          </a:prstGeom>
-          <a:noFill/>
-          <a:ln/>
-        </p:spPr>
-        <p:txBody>
-          <a:bodyPr wrap="square" lIns="76200" tIns="76200" rIns="76200" bIns="76200" rtlCol="0" anchor="t"/>
-          <a:lstStyle/>
-          <a:p>
-            <a:pPr algn="l" indent="0" marL="0">
-              <a:lnSpc>
-                <a:spcPts val="3600"/>
-              </a:lnSpc>
-              <a:buNone/>
-            </a:pPr>
-            <a:r>
-              <a:rPr lang="en-US" sz="2800" b="1" dirty="0">
-                <a:solidFill>
-                  <a:srgbClr val="962B7C"/>
-                </a:solidFill>
-                <a:latin typeface="Alexandria" pitchFamily="34" charset="0"/>
-                <a:ea typeface="Alexandria" pitchFamily="34" charset="-122"/>
-                <a:cs typeface="Alexandria" pitchFamily="34" charset="-120"/>
-              </a:rPr>
-              <a:t>100–145 phút</a:t>
-            </a:r>
-            <a:endParaRPr lang="en-US" sz="2800" dirty="0"/>
-          </a:p>
-        </p:txBody>
-      </p:sp>
-      <p:sp>
-        <p:nvSpPr>
-          <p:cNvPr id="9" name="Text 0"/>
+          <p:cNvPr id="8" name="Text 0"/>
           <p:cNvSpPr/>
           <p:nvPr>
             <p:ph idx="100" type="title" hasCustomPrompt="1"/>
@@ -43439,17 +43117,17 @@
         </p:nvSpPr>
         <p:spPr>
           <a:xfrm>
-            <a:off x="3840480" y="2103120"/>
-            <a:ext cx="6766560" cy="2194560"/>
-          </a:xfrm>
-          <a:prstGeom prst="rect">
-            <a:avLst/>
-          </a:prstGeom>
-          <a:noFill/>
-          <a:ln/>
-        </p:spPr>
-        <p:txBody>
-          <a:bodyPr wrap="square" lIns="76200" tIns="76200" rIns="76200" bIns="76200" rtlCol="0" anchor="t"/>
+            <a:off x="3840480" y="2240280"/>
+            <a:ext cx="6766560" cy="2377440"/>
+          </a:xfrm>
+          <a:prstGeom prst="rect">
+            <a:avLst/>
+          </a:prstGeom>
+          <a:noFill/>
+          <a:ln/>
+        </p:spPr>
+        <p:txBody>
+          <a:bodyPr wrap="square" lIns="76200" tIns="76200" rIns="76200" bIns="76200" rtlCol="0" anchor="ctr"/>
           <a:lstStyle/>
           <a:p>
             <a:pPr algn="l" indent="0" marL="0">
@@ -43638,7 +43316,7 @@
                 <a:ea typeface="Alexandria" pitchFamily="34" charset="-122"/>
                 <a:cs typeface="Alexandria" pitchFamily="34" charset="-120"/>
               </a:rPr>
-              <a:t>Xưởng phương pháp (45'): viết lại mục 4.3.2 cho đầy đủ</a:t>
+              <a:t>Xưởng phương pháp: viết lại mục 4.3.2 cho đầy đủ</a:t>
             </a:r>
             <a:endParaRPr lang="en-US" sz="3400" dirty="0"/>
           </a:p>
@@ -43675,7 +43353,7 @@
         <p:spPr>
           <a:xfrm>
             <a:off x="640080" y="1828800"/>
-            <a:ext cx="1280160" cy="548640"/>
+            <a:ext cx="731520" cy="548640"/>
           </a:xfrm>
           <a:prstGeom prst="roundRect">
             <a:avLst>
@@ -43697,7 +43375,7 @@
         <p:spPr>
           <a:xfrm>
             <a:off x="640080" y="1828800"/>
-            <a:ext cx="1280160" cy="548640"/>
+            <a:ext cx="731520" cy="548640"/>
           </a:xfrm>
           <a:prstGeom prst="rect">
             <a:avLst/>
@@ -43724,7 +43402,7 @@
                 <a:ea typeface="Alexandria" pitchFamily="34" charset="-122"/>
                 <a:cs typeface="Alexandria" pitchFamily="34" charset="-120"/>
               </a:rPr>
-              <a:t>12'</a:t>
+              <a:t>1</a:t>
             </a:r>
             <a:endParaRPr lang="en-US" sz="2400" dirty="0"/>
           </a:p>
@@ -43738,8 +43416,8 @@
         </p:nvSpPr>
         <p:spPr>
           <a:xfrm>
-            <a:off x="2103120" y="1783080"/>
-            <a:ext cx="9372600" cy="640080"/>
+            <a:off x="1554480" y="1783080"/>
+            <a:ext cx="9921240" cy="640080"/>
           </a:xfrm>
           <a:prstGeom prst="rect">
             <a:avLst/>
@@ -43753,12 +43431,12 @@
           <a:p>
             <a:pPr algn="l" indent="0" marL="0">
               <a:lnSpc>
-                <a:spcPts val="3500"/>
+                <a:spcPts val="3600"/>
               </a:lnSpc>
               <a:buNone/>
             </a:pPr>
             <a:r>
-              <a:rPr lang="en-US" sz="2700" dirty="0">
+              <a:rPr lang="en-US" sz="2800" dirty="0">
                 <a:solidFill>
                   <a:srgbClr val="2E2A3A"/>
                 </a:solidFill>
@@ -43768,7 +43446,7 @@
               </a:rPr>
               <a:t>Tìm 2–3 nguồn thứ cấp, đánh giá theo 4 tiêu chuẩn</a:t>
             </a:r>
-            <a:endParaRPr lang="en-US" sz="2700" dirty="0"/>
+            <a:endParaRPr lang="en-US" sz="2800" dirty="0"/>
           </a:p>
         </p:txBody>
       </p:sp>
@@ -43803,7 +43481,7 @@
         <p:spPr>
           <a:xfrm>
             <a:off x="640080" y="2606040"/>
-            <a:ext cx="1280160" cy="548640"/>
+            <a:ext cx="731520" cy="548640"/>
           </a:xfrm>
           <a:prstGeom prst="roundRect">
             <a:avLst>
@@ -43825,7 +43503,7 @@
         <p:spPr>
           <a:xfrm>
             <a:off x="640080" y="2606040"/>
-            <a:ext cx="1280160" cy="548640"/>
+            <a:ext cx="731520" cy="548640"/>
           </a:xfrm>
           <a:prstGeom prst="rect">
             <a:avLst/>
@@ -43852,7 +43530,7 @@
                 <a:ea typeface="Alexandria" pitchFamily="34" charset="-122"/>
                 <a:cs typeface="Alexandria" pitchFamily="34" charset="-120"/>
               </a:rPr>
-              <a:t>18'</a:t>
+              <a:t>2</a:t>
             </a:r>
             <a:endParaRPr lang="en-US" sz="2400" dirty="0"/>
           </a:p>
@@ -43866,8 +43544,8 @@
         </p:nvSpPr>
         <p:spPr>
           <a:xfrm>
-            <a:off x="2103120" y="2560320"/>
-            <a:ext cx="9372600" cy="640080"/>
+            <a:off x="1554480" y="2560320"/>
+            <a:ext cx="9921240" cy="640080"/>
           </a:xfrm>
           <a:prstGeom prst="rect">
             <a:avLst/>
@@ -43881,12 +43559,12 @@
           <a:p>
             <a:pPr algn="l" indent="0" marL="0">
               <a:lnSpc>
-                <a:spcPts val="3500"/>
+                <a:spcPts val="3600"/>
               </a:lnSpc>
               <a:buNone/>
             </a:pPr>
             <a:r>
-              <a:rPr lang="en-US" sz="2700" dirty="0">
+              <a:rPr lang="en-US" sz="2800" dirty="0">
                 <a:solidFill>
                   <a:srgbClr val="2E2A3A"/>
                 </a:solidFill>
@@ -43896,7 +43574,7 @@
               </a:rPr>
               <a:t>Chọn phương pháp, viết mô tả và cam kết đạo đức</a:t>
             </a:r>
-            <a:endParaRPr lang="en-US" sz="2700" dirty="0"/>
+            <a:endParaRPr lang="en-US" sz="2800" dirty="0"/>
           </a:p>
         </p:txBody>
       </p:sp>
@@ -43931,7 +43609,7 @@
         <p:spPr>
           <a:xfrm>
             <a:off x="640080" y="3383280"/>
-            <a:ext cx="1280160" cy="548640"/>
+            <a:ext cx="731520" cy="548640"/>
           </a:xfrm>
           <a:prstGeom prst="roundRect">
             <a:avLst>
@@ -43953,7 +43631,7 @@
         <p:spPr>
           <a:xfrm>
             <a:off x="640080" y="3383280"/>
-            <a:ext cx="1280160" cy="548640"/>
+            <a:ext cx="731520" cy="548640"/>
           </a:xfrm>
           <a:prstGeom prst="rect">
             <a:avLst/>
@@ -43980,7 +43658,7 @@
                 <a:ea typeface="Alexandria" pitchFamily="34" charset="-122"/>
                 <a:cs typeface="Alexandria" pitchFamily="34" charset="-120"/>
               </a:rPr>
-              <a:t>7'</a:t>
+              <a:t>3</a:t>
             </a:r>
             <a:endParaRPr lang="en-US" sz="2400" dirty="0"/>
           </a:p>
@@ -43994,8 +43672,8 @@
         </p:nvSpPr>
         <p:spPr>
           <a:xfrm>
-            <a:off x="2103120" y="3337560"/>
-            <a:ext cx="9372600" cy="640080"/>
+            <a:off x="1554480" y="3337560"/>
+            <a:ext cx="9921240" cy="640080"/>
           </a:xfrm>
           <a:prstGeom prst="rect">
             <a:avLst/>
@@ -44009,22 +43687,22 @@
           <a:p>
             <a:pPr algn="l" indent="0" marL="0">
               <a:lnSpc>
-                <a:spcPts val="3500"/>
+                <a:spcPts val="3600"/>
               </a:lnSpc>
               <a:buNone/>
             </a:pPr>
             <a:r>
-              <a:rPr lang="en-US" sz="2700" dirty="0">
-                <a:solidFill>
-                  <a:srgbClr val="2E2A3A"/>
-                </a:solidFill>
-                <a:latin typeface="Alexandria" pitchFamily="34" charset="0"/>
-                <a:ea typeface="Alexandria" pitchFamily="34" charset="-122"/>
-                <a:cs typeface="Alexandria" pitchFamily="34" charset="-120"/>
-              </a:rPr>
-              <a:t>Đóng vai phỏng vấn sâu 5' theo cặp + rút kinh nghiệm</a:t>
-            </a:r>
-            <a:endParaRPr lang="en-US" sz="2700" dirty="0"/>
+              <a:rPr lang="en-US" sz="2800" dirty="0">
+                <a:solidFill>
+                  <a:srgbClr val="2E2A3A"/>
+                </a:solidFill>
+                <a:latin typeface="Alexandria" pitchFamily="34" charset="0"/>
+                <a:ea typeface="Alexandria" pitchFamily="34" charset="-122"/>
+                <a:cs typeface="Alexandria" pitchFamily="34" charset="-120"/>
+              </a:rPr>
+              <a:t>Đóng vai phỏng vấn sâu theo cặp + rút kinh nghiệm</a:t>
+            </a:r>
+            <a:endParaRPr lang="en-US" sz="2800" dirty="0"/>
           </a:p>
         </p:txBody>
       </p:sp>
@@ -44059,7 +43737,7 @@
         <p:spPr>
           <a:xfrm>
             <a:off x="640080" y="4160520"/>
-            <a:ext cx="1280160" cy="548640"/>
+            <a:ext cx="731520" cy="548640"/>
           </a:xfrm>
           <a:prstGeom prst="roundRect">
             <a:avLst>
@@ -44081,7 +43759,7 @@
         <p:spPr>
           <a:xfrm>
             <a:off x="640080" y="4160520"/>
-            <a:ext cx="1280160" cy="548640"/>
+            <a:ext cx="731520" cy="548640"/>
           </a:xfrm>
           <a:prstGeom prst="rect">
             <a:avLst/>
@@ -44108,7 +43786,7 @@
                 <a:ea typeface="Alexandria" pitchFamily="34" charset="-122"/>
                 <a:cs typeface="Alexandria" pitchFamily="34" charset="-120"/>
               </a:rPr>
-              <a:t>8'</a:t>
+              <a:t>4</a:t>
             </a:r>
             <a:endParaRPr lang="en-US" sz="2400" dirty="0"/>
           </a:p>
@@ -44122,8 +43800,8 @@
         </p:nvSpPr>
         <p:spPr>
           <a:xfrm>
-            <a:off x="2103120" y="4114800"/>
-            <a:ext cx="9372600" cy="640080"/>
+            <a:off x="1554480" y="4114800"/>
+            <a:ext cx="9921240" cy="640080"/>
           </a:xfrm>
           <a:prstGeom prst="rect">
             <a:avLst/>
@@ -44137,22 +43815,22 @@
           <a:p>
             <a:pPr algn="l" indent="0" marL="0">
               <a:lnSpc>
-                <a:spcPts val="3500"/>
+                <a:spcPts val="3600"/>
               </a:lnSpc>
               <a:buNone/>
             </a:pPr>
             <a:r>
-              <a:rPr lang="en-US" sz="2700" dirty="0">
-                <a:solidFill>
-                  <a:srgbClr val="2E2A3A"/>
-                </a:solidFill>
-                <a:latin typeface="Alexandria" pitchFamily="34" charset="0"/>
-                <a:ea typeface="Alexandria" pitchFamily="34" charset="-122"/>
-                <a:cs typeface="Alexandria" pitchFamily="34" charset="-120"/>
-              </a:rPr>
-              <a:t>3 nhóm chia sẻ, mỗi nhóm 1,5 phút</a:t>
-            </a:r>
-            <a:endParaRPr lang="en-US" sz="2700" dirty="0"/>
+              <a:rPr lang="en-US" sz="2800" dirty="0">
+                <a:solidFill>
+                  <a:srgbClr val="2E2A3A"/>
+                </a:solidFill>
+                <a:latin typeface="Alexandria" pitchFamily="34" charset="0"/>
+                <a:ea typeface="Alexandria" pitchFamily="34" charset="-122"/>
+                <a:cs typeface="Alexandria" pitchFamily="34" charset="-120"/>
+              </a:rPr>
+              <a:t>3 nhóm chia sẻ</a:t>
+            </a:r>
+            <a:endParaRPr lang="en-US" sz="2800" dirty="0"/>
           </a:p>
         </p:txBody>
       </p:sp>
@@ -44510,49 +44188,7 @@
       </p:sp>
       <p:sp>
         <p:nvSpPr>
-          <p:cNvPr id="8" name="Text 6"/>
-          <p:cNvSpPr txBox="1"/>
-          <p:nvPr/>
-        </p:nvSpPr>
-        <p:spPr>
-          <a:xfrm>
-            <a:off x="3840480" y="1417320"/>
-            <a:ext cx="6766560" cy="594360"/>
-          </a:xfrm>
-          <a:prstGeom prst="rect">
-            <a:avLst/>
-          </a:prstGeom>
-          <a:noFill/>
-          <a:ln/>
-        </p:spPr>
-        <p:txBody>
-          <a:bodyPr wrap="square" lIns="76200" tIns="76200" rIns="76200" bIns="76200" rtlCol="0" anchor="t"/>
-          <a:lstStyle/>
-          <a:p>
-            <a:pPr algn="l" indent="0" marL="0">
-              <a:lnSpc>
-                <a:spcPts val="3600"/>
-              </a:lnSpc>
-              <a:buNone/>
-            </a:pPr>
-            <a:r>
-              <a:rPr lang="en-US" sz="2800" b="1" dirty="0">
-                <a:solidFill>
-                  <a:srgbClr val="962B7C"/>
-                </a:solidFill>
-                <a:latin typeface="Alexandria" pitchFamily="34" charset="0"/>
-                <a:ea typeface="Alexandria" pitchFamily="34" charset="-122"/>
-                <a:cs typeface="Alexandria" pitchFamily="34" charset="-120"/>
-              </a:rPr>
-              <a:t>145–150 phút</a:t>
-            </a:r>
-            <a:endParaRPr lang="en-US" sz="2800" dirty="0"/>
-          </a:p>
-        </p:txBody>
-      </p:sp>
-      <p:sp>
-        <p:nvSpPr>
-          <p:cNvPr id="9" name="Text 0"/>
+          <p:cNvPr id="8" name="Text 0"/>
           <p:cNvSpPr/>
           <p:nvPr>
             <p:ph idx="100" type="title" hasCustomPrompt="1"/>
@@ -44560,17 +44196,17 @@
         </p:nvSpPr>
         <p:spPr>
           <a:xfrm>
-            <a:off x="3840480" y="2103120"/>
-            <a:ext cx="6766560" cy="2194560"/>
-          </a:xfrm>
-          <a:prstGeom prst="rect">
-            <a:avLst/>
-          </a:prstGeom>
-          <a:noFill/>
-          <a:ln/>
-        </p:spPr>
-        <p:txBody>
-          <a:bodyPr wrap="square" lIns="76200" tIns="76200" rIns="76200" bIns="76200" rtlCol="0" anchor="t"/>
+            <a:off x="3840480" y="2240280"/>
+            <a:ext cx="6766560" cy="2377440"/>
+          </a:xfrm>
+          <a:prstGeom prst="rect">
+            <a:avLst/>
+          </a:prstGeom>
+          <a:noFill/>
+          <a:ln/>
+        </p:spPr>
+        <p:txBody>
+          <a:bodyPr wrap="square" lIns="76200" tIns="76200" rIns="76200" bIns="76200" rtlCol="0" anchor="ctr"/>
           <a:lstStyle/>
           <a:p>
             <a:pPr algn="l" indent="0" marL="0">
